--- a/tema2/diapositivas/autenticacion-jwt.pptx
+++ b/tema2/diapositivas/autenticacion-jwt.pptx
@@ -4,6 +4,9 @@
   <p:sldMasterIdLst>
     <p:sldMasterId id="2147483648" r:id="rId1"/>
   </p:sldMasterIdLst>
+  <p:notesMasterIdLst>
+    <p:notesMasterId r:id="rId40"/>
+  </p:notesMasterIdLst>
   <p:sldIdLst>
     <p:sldId id="256" r:id="rId2"/>
     <p:sldId id="257" r:id="rId3"/>
@@ -44,9 +47,6 @@
     <p:sldId id="292" r:id="rId38"/>
     <p:sldId id="293" r:id="rId39"/>
   </p:sldIdLst>
-  <p:notesMasterIdLst>
-    <p:notesMasterId r:id="rId40"/>
-  </p:notesMasterIdLst>
   <p:sldSz cx="12192000" cy="6858000"/>
   <p:notesSz cx="6858000" cy="12192000"/>
   <p:defaultTextStyle>
@@ -141,6 +141,11 @@
       </a:defRPr>
     </a:lvl9pPr>
   </p:defaultTextStyle>
+  <p:extLst>
+    <p:ext uri="{EFAFB233-063F-42B5-8137-9DF3F51BA10A}">
+      <p15:sldGuideLst xmlns:p15="http://schemas.microsoft.com/office/powerpoint/2012/main"/>
+    </p:ext>
+  </p:extLst>
 </p:presentation>
 </file>
 
@@ -166,234 +171,10 @@
           <a:chExt cx="0" cy="0"/>
         </a:xfrm>
       </p:grpSpPr>
-      <p:sp>
-        <p:nvSpPr>
-          <p:cNvPr id="2" name="Header Placeholder 1"/>
-          <p:cNvSpPr>
-            <a:spLocks noGrp="1"/>
-          </p:cNvSpPr>
-          <p:nvPr>
-            <p:ph type="hdr" sz="quarter"/>
-          </p:nvPr>
-        </p:nvSpPr>
-        <p:spPr>
-          <a:xfrm>
-            <a:off x="0" y="0"/>
-            <a:ext cx="2971800" cy="458788"/>
-          </a:xfrm>
-          <a:prstGeom prst="rect">
-            <a:avLst/>
-          </a:prstGeom>
-        </p:spPr>
-        <p:txBody>
-          <a:bodyPr vert="horz" lIns="91440" tIns="45720" rIns="91440" bIns="45720" rtlCol="0"/>
-          <a:lstStyle>
-            <a:lvl1pPr algn="l">
-              <a:defRPr sz="1200"/>
-            </a:lvl1pPr>
-          </a:lstStyle>
-          <a:p>
-            <a:endParaRPr lang="en-US"/>
-          </a:p>
-        </p:txBody>
-      </p:sp>
-      <p:sp>
-        <p:nvSpPr>
-          <p:cNvPr id="3" name="Date Placeholder 2"/>
-          <p:cNvSpPr>
-            <a:spLocks noGrp="1"/>
-          </p:cNvSpPr>
-          <p:nvPr>
-            <p:ph type="dt" idx="1"/>
-          </p:nvPr>
-        </p:nvSpPr>
-        <p:spPr>
-          <a:xfrm>
-            <a:off x="3884613" y="0"/>
-            <a:ext cx="2971800" cy="458788"/>
-          </a:xfrm>
-          <a:prstGeom prst="rect">
-            <a:avLst/>
-          </a:prstGeom>
-        </p:spPr>
-        <p:txBody>
-          <a:bodyPr vert="horz" lIns="91440" tIns="45720" rIns="91440" bIns="45720" rtlCol="0"/>
-          <a:lstStyle>
-            <a:lvl1pPr algn="r">
-              <a:defRPr sz="1200"/>
-            </a:lvl1pPr>
-          </a:lstStyle>
-          <a:p>
-            <a:fld id="{5282F153-3F37-0F45-9E97-73ACFA13230C}" type="datetimeFigureOut">
-              <a:rPr lang="en-US"/>
-              <a:t>7/23/19</a:t>
-            </a:fld>
-            <a:endParaRPr lang="en-US"/>
-          </a:p>
-        </p:txBody>
-      </p:sp>
-      <p:sp>
-        <p:nvSpPr>
-          <p:cNvPr id="4" name="Slide Image Placeholder 3"/>
-          <p:cNvSpPr>
-            <a:spLocks noGrp="1" noRot="1" noChangeAspect="1"/>
-          </p:cNvSpPr>
-          <p:nvPr>
-            <p:ph type="sldImg" idx="2"/>
-          </p:nvPr>
-        </p:nvSpPr>
-        <p:spPr>
-          <a:xfrm>
-            <a:off x="685800" y="1143000"/>
-            <a:ext cx="5486400" cy="3086100"/>
-          </a:xfrm>
-          <a:prstGeom prst="rect">
-            <a:avLst/>
-          </a:prstGeom>
-          <a:noFill/>
-          <a:ln w="12700">
-            <a:solidFill>
-              <a:prstClr val="black"/>
-            </a:solidFill>
-          </a:ln>
-        </p:spPr>
-        <p:txBody>
-          <a:bodyPr vert="horz" lIns="91440" tIns="45720" rIns="91440" bIns="45720" rtlCol="0" anchor="ctr"/>
-          <a:lstStyle/>
-          <a:p>
-            <a:endParaRPr lang="en-US"/>
-          </a:p>
-        </p:txBody>
-      </p:sp>
-      <p:sp>
-        <p:nvSpPr>
-          <p:cNvPr id="5" name="Notes Placeholder 4"/>
-          <p:cNvSpPr>
-            <a:spLocks noGrp="1"/>
-          </p:cNvSpPr>
-          <p:nvPr>
-            <p:ph type="body" sz="quarter" idx="3"/>
-          </p:nvPr>
-        </p:nvSpPr>
-        <p:spPr>
-          <a:xfrm>
-            <a:off x="685800" y="4400550"/>
-            <a:ext cx="5486400" cy="3600450"/>
-          </a:xfrm>
-          <a:prstGeom prst="rect">
-            <a:avLst/>
-          </a:prstGeom>
-        </p:spPr>
-        <p:txBody>
-          <a:bodyPr vert="horz" lIns="91440" tIns="45720" rIns="91440" bIns="45720" rtlCol="0"/>
-          <a:lstStyle/>
-          <a:p>
-            <a:pPr lvl="0"/>
-            <a:r>
-              <a:rPr lang="en-US"/>
-              <a:t>Click to edit Master text styles</a:t>
-            </a:r>
-          </a:p>
-          <a:p>
-            <a:pPr lvl="1"/>
-            <a:r>
-              <a:rPr lang="en-US"/>
-              <a:t>Second level</a:t>
-            </a:r>
-          </a:p>
-          <a:p>
-            <a:pPr lvl="2"/>
-            <a:r>
-              <a:rPr lang="en-US"/>
-              <a:t>Third level</a:t>
-            </a:r>
-          </a:p>
-          <a:p>
-            <a:pPr lvl="3"/>
-            <a:r>
-              <a:rPr lang="en-US"/>
-              <a:t>Fourth level</a:t>
-            </a:r>
-          </a:p>
-          <a:p>
-            <a:pPr lvl="4"/>
-            <a:r>
-              <a:rPr lang="en-US"/>
-              <a:t>Fifth level</a:t>
-            </a:r>
-          </a:p>
-        </p:txBody>
-      </p:sp>
-      <p:sp>
-        <p:nvSpPr>
-          <p:cNvPr id="6" name="Footer Placeholder 5"/>
-          <p:cNvSpPr>
-            <a:spLocks noGrp="1"/>
-          </p:cNvSpPr>
-          <p:nvPr>
-            <p:ph type="ftr" sz="quarter" idx="4"/>
-          </p:nvPr>
-        </p:nvSpPr>
-        <p:spPr>
-          <a:xfrm>
-            <a:off x="0" y="8685213"/>
-            <a:ext cx="2971800" cy="458787"/>
-          </a:xfrm>
-          <a:prstGeom prst="rect">
-            <a:avLst/>
-          </a:prstGeom>
-        </p:spPr>
-        <p:txBody>
-          <a:bodyPr vert="horz" lIns="91440" tIns="45720" rIns="91440" bIns="45720" rtlCol="0" anchor="b"/>
-          <a:lstStyle>
-            <a:lvl1pPr algn="l">
-              <a:defRPr sz="1200"/>
-            </a:lvl1pPr>
-          </a:lstStyle>
-          <a:p>
-            <a:endParaRPr lang="en-US"/>
-          </a:p>
-        </p:txBody>
-      </p:sp>
-      <p:sp>
-        <p:nvSpPr>
-          <p:cNvPr id="7" name="Slide Number Placeholder 6"/>
-          <p:cNvSpPr>
-            <a:spLocks noGrp="1"/>
-          </p:cNvSpPr>
-          <p:nvPr>
-            <p:ph type="sldNum" sz="quarter" idx="5"/>
-          </p:nvPr>
-        </p:nvSpPr>
-        <p:spPr>
-          <a:xfrm>
-            <a:off x="3884613" y="8685213"/>
-            <a:ext cx="2971800" cy="458787"/>
-          </a:xfrm>
-          <a:prstGeom prst="rect">
-            <a:avLst/>
-          </a:prstGeom>
-        </p:spPr>
-        <p:txBody>
-          <a:bodyPr vert="horz" lIns="91440" tIns="45720" rIns="91440" bIns="45720" rtlCol="0" anchor="b"/>
-          <a:lstStyle>
-            <a:lvl1pPr algn="r">
-              <a:defRPr sz="1200"/>
-            </a:lvl1pPr>
-          </a:lstStyle>
-          <a:p>
-            <a:fld id="{CE5E9CC1-C706-0F49-92D6-E571CC5EEA8F}" type="slidenum">
-              <a:rPr lang="en-US"/>
-              <a:t>‹#›</a:t>
-            </a:fld>
-            <a:endParaRPr lang="en-US"/>
-          </a:p>
-        </p:txBody>
-      </p:sp>
     </p:spTree>
     <p:extLst>
       <p:ext uri="{BB962C8B-B14F-4D97-AF65-F5344CB8AC3E}">
-        <p14:creationId xmlns:p14="http://schemas.microsoft.com/office/powerpoint/2010/main" val="1024086991"/>
+        <p14:creationId xmlns:p14="http://schemas.microsoft.com/office/powerpoint/2010/main" val="3331901987"/>
       </p:ext>
     </p:extLst>
   </p:cSld>
@@ -537,10 +318,6 @@
           <a:bodyPr/>
           <a:lstStyle/>
           <a:p>
-            <a:r>
-              <a:rPr lang="en-US" dirty="0"/>
-              <a:t/>
-            </a:r>
             <a:endParaRPr lang="en-US" dirty="0"/>
           </a:p>
         </p:txBody>
@@ -625,10 +402,6 @@
           <a:bodyPr/>
           <a:lstStyle/>
           <a:p>
-            <a:r>
-              <a:rPr lang="en-US" dirty="0"/>
-              <a:t/>
-            </a:r>
             <a:endParaRPr lang="en-US" dirty="0"/>
           </a:p>
         </p:txBody>
@@ -713,10 +486,6 @@
           <a:bodyPr/>
           <a:lstStyle/>
           <a:p>
-            <a:r>
-              <a:rPr lang="en-US" dirty="0"/>
-              <a:t/>
-            </a:r>
             <a:endParaRPr lang="en-US" dirty="0"/>
           </a:p>
         </p:txBody>
@@ -801,10 +570,6 @@
           <a:bodyPr/>
           <a:lstStyle/>
           <a:p>
-            <a:r>
-              <a:rPr lang="en-US" dirty="0"/>
-              <a:t/>
-            </a:r>
             <a:endParaRPr lang="en-US" dirty="0"/>
           </a:p>
         </p:txBody>
@@ -889,10 +654,6 @@
           <a:bodyPr/>
           <a:lstStyle/>
           <a:p>
-            <a:r>
-              <a:rPr lang="en-US" dirty="0"/>
-              <a:t/>
-            </a:r>
             <a:endParaRPr lang="en-US" dirty="0"/>
           </a:p>
         </p:txBody>
@@ -977,10 +738,6 @@
           <a:bodyPr/>
           <a:lstStyle/>
           <a:p>
-            <a:r>
-              <a:rPr lang="en-US" dirty="0"/>
-              <a:t/>
-            </a:r>
             <a:endParaRPr lang="en-US" dirty="0"/>
           </a:p>
         </p:txBody>
@@ -1065,10 +822,6 @@
           <a:bodyPr/>
           <a:lstStyle/>
           <a:p>
-            <a:r>
-              <a:rPr lang="en-US" dirty="0"/>
-              <a:t/>
-            </a:r>
             <a:endParaRPr lang="en-US" dirty="0"/>
           </a:p>
         </p:txBody>
@@ -1153,10 +906,6 @@
           <a:bodyPr/>
           <a:lstStyle/>
           <a:p>
-            <a:r>
-              <a:rPr lang="en-US" dirty="0"/>
-              <a:t/>
-            </a:r>
             <a:endParaRPr lang="en-US" dirty="0"/>
           </a:p>
         </p:txBody>
@@ -1241,10 +990,6 @@
           <a:bodyPr/>
           <a:lstStyle/>
           <a:p>
-            <a:r>
-              <a:rPr lang="en-US" dirty="0"/>
-              <a:t/>
-            </a:r>
             <a:endParaRPr lang="en-US" dirty="0"/>
           </a:p>
         </p:txBody>
@@ -1329,10 +1074,6 @@
           <a:bodyPr/>
           <a:lstStyle/>
           <a:p>
-            <a:r>
-              <a:rPr lang="en-US" dirty="0"/>
-              <a:t/>
-            </a:r>
             <a:endParaRPr lang="en-US" dirty="0"/>
           </a:p>
         </p:txBody>
@@ -1417,10 +1158,6 @@
           <a:bodyPr/>
           <a:lstStyle/>
           <a:p>
-            <a:r>
-              <a:rPr lang="en-US" dirty="0"/>
-              <a:t/>
-            </a:r>
             <a:endParaRPr lang="en-US" dirty="0"/>
           </a:p>
         </p:txBody>
@@ -1505,10 +1242,6 @@
           <a:bodyPr/>
           <a:lstStyle/>
           <a:p>
-            <a:r>
-              <a:rPr lang="en-US" dirty="0"/>
-              <a:t/>
-            </a:r>
             <a:endParaRPr lang="en-US" dirty="0"/>
           </a:p>
         </p:txBody>
@@ -1593,10 +1326,6 @@
           <a:bodyPr/>
           <a:lstStyle/>
           <a:p>
-            <a:r>
-              <a:rPr lang="en-US" dirty="0"/>
-              <a:t/>
-            </a:r>
             <a:endParaRPr lang="en-US" dirty="0"/>
           </a:p>
         </p:txBody>
@@ -1681,10 +1410,6 @@
           <a:bodyPr/>
           <a:lstStyle/>
           <a:p>
-            <a:r>
-              <a:rPr lang="en-US" dirty="0"/>
-              <a:t/>
-            </a:r>
             <a:endParaRPr lang="en-US" dirty="0"/>
           </a:p>
         </p:txBody>
@@ -1769,10 +1494,6 @@
           <a:bodyPr/>
           <a:lstStyle/>
           <a:p>
-            <a:r>
-              <a:rPr lang="en-US" dirty="0"/>
-              <a:t/>
-            </a:r>
             <a:endParaRPr lang="en-US" dirty="0"/>
           </a:p>
         </p:txBody>
@@ -1857,10 +1578,6 @@
           <a:bodyPr/>
           <a:lstStyle/>
           <a:p>
-            <a:r>
-              <a:rPr lang="en-US" dirty="0"/>
-              <a:t/>
-            </a:r>
             <a:endParaRPr lang="en-US" dirty="0"/>
           </a:p>
         </p:txBody>
@@ -1945,10 +1662,6 @@
           <a:bodyPr/>
           <a:lstStyle/>
           <a:p>
-            <a:r>
-              <a:rPr lang="en-US" dirty="0"/>
-              <a:t/>
-            </a:r>
             <a:endParaRPr lang="en-US" dirty="0"/>
           </a:p>
         </p:txBody>
@@ -2033,10 +1746,6 @@
           <a:bodyPr/>
           <a:lstStyle/>
           <a:p>
-            <a:r>
-              <a:rPr lang="en-US" dirty="0"/>
-              <a:t/>
-            </a:r>
             <a:endParaRPr lang="en-US" dirty="0"/>
           </a:p>
         </p:txBody>
@@ -2121,10 +1830,6 @@
           <a:bodyPr/>
           <a:lstStyle/>
           <a:p>
-            <a:r>
-              <a:rPr lang="en-US" dirty="0"/>
-              <a:t/>
-            </a:r>
             <a:endParaRPr lang="en-US" dirty="0"/>
           </a:p>
         </p:txBody>
@@ -2209,10 +1914,6 @@
           <a:bodyPr/>
           <a:lstStyle/>
           <a:p>
-            <a:r>
-              <a:rPr lang="en-US" dirty="0"/>
-              <a:t/>
-            </a:r>
             <a:endParaRPr lang="en-US" dirty="0"/>
           </a:p>
         </p:txBody>
@@ -2297,10 +1998,6 @@
           <a:bodyPr/>
           <a:lstStyle/>
           <a:p>
-            <a:r>
-              <a:rPr lang="en-US" dirty="0"/>
-              <a:t/>
-            </a:r>
             <a:endParaRPr lang="en-US" dirty="0"/>
           </a:p>
         </p:txBody>
@@ -2385,10 +2082,6 @@
           <a:bodyPr/>
           <a:lstStyle/>
           <a:p>
-            <a:r>
-              <a:rPr lang="en-US" dirty="0"/>
-              <a:t/>
-            </a:r>
             <a:endParaRPr lang="en-US" dirty="0"/>
           </a:p>
         </p:txBody>
@@ -2473,10 +2166,6 @@
           <a:bodyPr/>
           <a:lstStyle/>
           <a:p>
-            <a:r>
-              <a:rPr lang="en-US" dirty="0"/>
-              <a:t/>
-            </a:r>
             <a:endParaRPr lang="en-US" dirty="0"/>
           </a:p>
         </p:txBody>
@@ -2561,10 +2250,6 @@
           <a:bodyPr/>
           <a:lstStyle/>
           <a:p>
-            <a:r>
-              <a:rPr lang="en-US" dirty="0"/>
-              <a:t/>
-            </a:r>
             <a:endParaRPr lang="en-US" dirty="0"/>
           </a:p>
         </p:txBody>
@@ -2649,10 +2334,6 @@
           <a:bodyPr/>
           <a:lstStyle/>
           <a:p>
-            <a:r>
-              <a:rPr lang="en-US" dirty="0"/>
-              <a:t/>
-            </a:r>
             <a:endParaRPr lang="en-US" dirty="0"/>
           </a:p>
         </p:txBody>
@@ -2737,10 +2418,6 @@
           <a:bodyPr/>
           <a:lstStyle/>
           <a:p>
-            <a:r>
-              <a:rPr lang="en-US" dirty="0"/>
-              <a:t/>
-            </a:r>
             <a:endParaRPr lang="en-US" dirty="0"/>
           </a:p>
         </p:txBody>
@@ -2825,10 +2502,6 @@
           <a:bodyPr/>
           <a:lstStyle/>
           <a:p>
-            <a:r>
-              <a:rPr lang="en-US" dirty="0"/>
-              <a:t/>
-            </a:r>
             <a:endParaRPr lang="en-US" dirty="0"/>
           </a:p>
         </p:txBody>
@@ -2913,10 +2586,6 @@
           <a:bodyPr/>
           <a:lstStyle/>
           <a:p>
-            <a:r>
-              <a:rPr lang="en-US" dirty="0"/>
-              <a:t/>
-            </a:r>
             <a:endParaRPr lang="en-US" dirty="0"/>
           </a:p>
         </p:txBody>
@@ -3001,10 +2670,6 @@
           <a:bodyPr/>
           <a:lstStyle/>
           <a:p>
-            <a:r>
-              <a:rPr lang="en-US" dirty="0"/>
-              <a:t/>
-            </a:r>
             <a:endParaRPr lang="en-US" dirty="0"/>
           </a:p>
         </p:txBody>
@@ -3089,10 +2754,6 @@
           <a:bodyPr/>
           <a:lstStyle/>
           <a:p>
-            <a:r>
-              <a:rPr lang="en-US" dirty="0"/>
-              <a:t/>
-            </a:r>
             <a:endParaRPr lang="en-US" dirty="0"/>
           </a:p>
         </p:txBody>
@@ -3177,10 +2838,6 @@
           <a:bodyPr/>
           <a:lstStyle/>
           <a:p>
-            <a:r>
-              <a:rPr lang="en-US" dirty="0"/>
-              <a:t/>
-            </a:r>
             <a:endParaRPr lang="en-US" dirty="0"/>
           </a:p>
         </p:txBody>
@@ -3265,10 +2922,6 @@
           <a:bodyPr/>
           <a:lstStyle/>
           <a:p>
-            <a:r>
-              <a:rPr lang="en-US" dirty="0"/>
-              <a:t/>
-            </a:r>
             <a:endParaRPr lang="en-US" dirty="0"/>
           </a:p>
         </p:txBody>
@@ -3353,10 +3006,6 @@
           <a:bodyPr/>
           <a:lstStyle/>
           <a:p>
-            <a:r>
-              <a:rPr lang="en-US" dirty="0"/>
-              <a:t/>
-            </a:r>
             <a:endParaRPr lang="en-US" dirty="0"/>
           </a:p>
         </p:txBody>
@@ -3441,10 +3090,6 @@
           <a:bodyPr/>
           <a:lstStyle/>
           <a:p>
-            <a:r>
-              <a:rPr lang="en-US" dirty="0"/>
-              <a:t/>
-            </a:r>
             <a:endParaRPr lang="en-US" dirty="0"/>
           </a:p>
         </p:txBody>
@@ -3529,10 +3174,6 @@
           <a:bodyPr/>
           <a:lstStyle/>
           <a:p>
-            <a:r>
-              <a:rPr lang="en-US" dirty="0"/>
-              <a:t/>
-            </a:r>
             <a:endParaRPr lang="en-US" dirty="0"/>
           </a:p>
         </p:txBody>
@@ -3617,10 +3258,6 @@
           <a:bodyPr/>
           <a:lstStyle/>
           <a:p>
-            <a:r>
-              <a:rPr lang="en-US" dirty="0"/>
-              <a:t/>
-            </a:r>
             <a:endParaRPr lang="en-US" dirty="0"/>
           </a:p>
         </p:txBody>
@@ -3705,10 +3342,6 @@
           <a:bodyPr/>
           <a:lstStyle/>
           <a:p>
-            <a:r>
-              <a:rPr lang="en-US" dirty="0"/>
-              <a:t/>
-            </a:r>
             <a:endParaRPr lang="en-US" dirty="0"/>
           </a:p>
         </p:txBody>
@@ -3793,10 +3426,6 @@
           <a:bodyPr/>
           <a:lstStyle/>
           <a:p>
-            <a:r>
-              <a:rPr lang="en-US" dirty="0"/>
-              <a:t/>
-            </a:r>
             <a:endParaRPr lang="en-US" dirty="0"/>
           </a:p>
         </p:txBody>
@@ -3870,6 +3499,11 @@
 <file path=ppt/slideMasters/slideMaster1.xml><?xml version="1.0" encoding="utf-8"?>
 <p:sldMaster xmlns:a="http://schemas.openxmlformats.org/drawingml/2006/main" xmlns:r="http://schemas.openxmlformats.org/officeDocument/2006/relationships" xmlns:p="http://schemas.openxmlformats.org/presentationml/2006/main">
   <p:cSld>
+    <p:bg>
+      <p:bgRef idx="1001">
+        <a:schemeClr val="bg1"/>
+      </p:bgRef>
+    </p:bg>
     <p:spTree>
       <p:nvGrpSpPr>
         <p:cNvPr id="1" name=""/>
@@ -4152,6 +3786,7 @@
         <a:solidFill>
           <a:srgbClr val="4E342E"/>
         </a:solidFill>
+        <a:effectLst/>
       </p:bgPr>
     </p:bg>
     <p:spTree>
@@ -4189,7 +3824,7 @@
           <a:bodyPr wrap="square" rtlCol="0" anchor="ctr"/>
           <a:lstStyle/>
           <a:p>
-            <a:pPr indent="0" marL="0">
+            <a:pPr marL="0" indent="0">
               <a:buNone/>
             </a:pPr>
             <a:r>
@@ -4228,7 +3863,7 @@
           <a:bodyPr wrap="square" rtlCol="0" anchor="ctr"/>
           <a:lstStyle/>
           <a:p>
-            <a:pPr algn="l" indent="0" marL="0">
+            <a:pPr marL="0" indent="0" algn="l">
               <a:buNone/>
             </a:pPr>
             <a:r>
@@ -4245,7 +3880,7 @@
             <a:endParaRPr lang="en-US" sz="4000" dirty="0"/>
           </a:p>
           <a:p>
-            <a:pPr algn="l" indent="0" marL="0">
+            <a:pPr marL="0" indent="0" algn="l">
               <a:buNone/>
             </a:pPr>
             <a:r>
@@ -4287,6 +3922,13 @@
             <a:prstDash val="solid"/>
           </a:ln>
         </p:spPr>
+        <p:txBody>
+          <a:bodyPr/>
+          <a:lstStyle/>
+          <a:p>
+            <a:endParaRPr lang="es-ES"/>
+          </a:p>
+        </p:txBody>
       </p:sp>
       <p:sp>
         <p:nvSpPr>
@@ -4309,7 +3951,7 @@
           <a:bodyPr wrap="square" rtlCol="0" anchor="ctr"/>
           <a:lstStyle/>
           <a:p>
-            <a:pPr indent="0" marL="0">
+            <a:pPr marL="0" indent="0">
               <a:buNone/>
             </a:pPr>
             <a:r>
@@ -4376,6 +4018,13 @@
             <a:prstDash val="solid"/>
           </a:ln>
         </p:spPr>
+        <p:txBody>
+          <a:bodyPr/>
+          <a:lstStyle/>
+          <a:p>
+            <a:endParaRPr lang="es-ES"/>
+          </a:p>
+        </p:txBody>
       </p:sp>
       <p:sp>
         <p:nvSpPr>
@@ -4398,7 +4047,7 @@
           <a:bodyPr wrap="square" rtlCol="0" anchor="ctr"/>
           <a:lstStyle/>
           <a:p>
-            <a:pPr indent="0" marL="0">
+            <a:pPr marL="0" indent="0">
               <a:buNone/>
             </a:pPr>
             <a:r>
@@ -4437,7 +4086,7 @@
           <a:bodyPr wrap="square" rtlCol="0" anchor="ctr"/>
           <a:lstStyle/>
           <a:p>
-            <a:pPr algn="r" indent="0" marL="0">
+            <a:pPr marL="0" indent="0" algn="r">
               <a:buNone/>
             </a:pPr>
             <a:r>
@@ -4476,7 +4125,7 @@
           <a:bodyPr wrap="square" rtlCol="0" anchor="t"/>
           <a:lstStyle/>
           <a:p>
-            <a:pPr indent="0" marL="0">
+            <a:pPr marL="0" indent="0">
               <a:buNone/>
             </a:pPr>
             <a:r>
@@ -4518,6 +4167,13 @@
             <a:prstDash val="solid"/>
           </a:ln>
         </p:spPr>
+        <p:txBody>
+          <a:bodyPr/>
+          <a:lstStyle/>
+          <a:p>
+            <a:endParaRPr lang="es-ES"/>
+          </a:p>
+        </p:txBody>
       </p:sp>
       <p:sp>
         <p:nvSpPr>
@@ -4543,6 +4199,13 @@
             <a:prstDash val="solid"/>
           </a:ln>
         </p:spPr>
+        <p:txBody>
+          <a:bodyPr/>
+          <a:lstStyle/>
+          <a:p>
+            <a:endParaRPr lang="es-ES"/>
+          </a:p>
+        </p:txBody>
       </p:sp>
       <p:sp>
         <p:nvSpPr>
@@ -4565,7 +4228,7 @@
           <a:bodyPr wrap="square" rtlCol="0" anchor="t"/>
           <a:lstStyle/>
           <a:p>
-            <a:pPr indent="0" marL="0">
+            <a:pPr marL="0" indent="0">
               <a:buNone/>
             </a:pPr>
             <a:r>
@@ -4599,15 +4262,27 @@
         </p:nvGraphicFramePr>
         <p:xfrm>
           <a:off x="548640" y="3017520"/>
-          <a:ext cx="11091672" cy="914400"/>
+          <a:ext cx="11091672" cy="2194560"/>
         </p:xfrm>
         <a:graphic>
           <a:graphicData uri="http://schemas.openxmlformats.org/drawingml/2006/table">
             <a:tbl>
               <a:tblPr/>
               <a:tblGrid>
-                <a:gridCol w="2218334"/>
-                <a:gridCol w="8873338"/>
+                <a:gridCol w="2218334">
+                  <a:extLst>
+                    <a:ext uri="{9D8B030D-6E8A-4147-A177-3AD203B41FA5}">
+                      <a16:colId xmlns:a16="http://schemas.microsoft.com/office/drawing/2014/main" val="20000"/>
+                    </a:ext>
+                  </a:extLst>
+                </a:gridCol>
+                <a:gridCol w="8873338">
+                  <a:extLst>
+                    <a:ext uri="{9D8B030D-6E8A-4147-A177-3AD203B41FA5}">
+                      <a16:colId xmlns:a16="http://schemas.microsoft.com/office/drawing/2014/main" val="20001"/>
+                    </a:ext>
+                  </a:extLst>
+                </a:gridCol>
               </a:tblGrid>
               <a:tr h="548640">
                 <a:tc>
@@ -4615,7 +4290,7 @@
                     <a:bodyPr/>
                     <a:lstStyle/>
                     <a:p>
-                      <a:pPr algn="ctr" indent="0" marL="0">
+                      <a:pPr marL="0" indent="0" algn="ctr">
                         <a:buNone/>
                       </a:pPr>
                       <a:r>
@@ -4636,7 +4311,7 @@
                       </a:endParaRPr>
                     </a:p>
                   </a:txBody>
-                  <a:tcPr marL="91440" marR="91440" marT="45720" marB="45720" anchor="ctr">
+                  <a:tcPr anchor="ctr">
                     <a:lnL w="12700" cap="flat" cmpd="sng" algn="ctr">
                       <a:solidFill>
                         <a:srgbClr val="EEEEEE"/>
@@ -4683,7 +4358,7 @@
                     <a:bodyPr/>
                     <a:lstStyle/>
                     <a:p>
-                      <a:pPr algn="ctr" indent="0" marL="0">
+                      <a:pPr marL="0" indent="0" algn="ctr">
                         <a:buNone/>
                       </a:pPr>
                       <a:r>
@@ -4704,7 +4379,7 @@
                       </a:endParaRPr>
                     </a:p>
                   </a:txBody>
-                  <a:tcPr marL="91440" marR="91440" marT="45720" marB="45720" anchor="ctr">
+                  <a:tcPr anchor="ctr">
                     <a:lnL w="12700" cap="flat" cmpd="sng" algn="ctr">
                       <a:solidFill>
                         <a:srgbClr val="EEEEEE"/>
@@ -4746,6 +4421,11 @@
                     </a:solidFill>
                   </a:tcPr>
                 </a:tc>
+                <a:extLst>
+                  <a:ext uri="{0D108BD9-81ED-4DB2-BD59-A6C34878D82A}">
+                    <a16:rowId xmlns:a16="http://schemas.microsoft.com/office/drawing/2014/main" val="10000"/>
+                  </a:ext>
+                </a:extLst>
               </a:tr>
               <a:tr h="548640">
                 <a:tc>
@@ -4753,7 +4433,7 @@
                     <a:bodyPr/>
                     <a:lstStyle/>
                     <a:p>
-                      <a:pPr indent="0" marL="0">
+                      <a:pPr marL="0" indent="0">
                         <a:buNone/>
                       </a:pPr>
                       <a:r>
@@ -4774,7 +4454,7 @@
                       </a:endParaRPr>
                     </a:p>
                   </a:txBody>
-                  <a:tcPr marL="91440" marR="91440" marT="45720" marB="45720" anchor="ctr">
+                  <a:tcPr anchor="ctr">
                     <a:lnL w="12700" cap="flat" cmpd="sng" algn="ctr">
                       <a:solidFill>
                         <a:srgbClr val="EEEEEE"/>
@@ -4821,7 +4501,7 @@
                     <a:bodyPr/>
                     <a:lstStyle/>
                     <a:p>
-                      <a:pPr indent="0" marL="0">
+                      <a:pPr marL="0" indent="0">
                         <a:buNone/>
                       </a:pPr>
                       <a:r>
@@ -4842,7 +4522,7 @@
                       </a:endParaRPr>
                     </a:p>
                   </a:txBody>
-                  <a:tcPr marL="91440" marR="91440" marT="45720" marB="45720" anchor="ctr">
+                  <a:tcPr anchor="ctr">
                     <a:lnL w="12700" cap="flat" cmpd="sng" algn="ctr">
                       <a:solidFill>
                         <a:srgbClr val="EEEEEE"/>
@@ -4884,6 +4564,11 @@
                     </a:solidFill>
                   </a:tcPr>
                 </a:tc>
+                <a:extLst>
+                  <a:ext uri="{0D108BD9-81ED-4DB2-BD59-A6C34878D82A}">
+                    <a16:rowId xmlns:a16="http://schemas.microsoft.com/office/drawing/2014/main" val="10001"/>
+                  </a:ext>
+                </a:extLst>
               </a:tr>
               <a:tr h="548640">
                 <a:tc>
@@ -4891,7 +4576,7 @@
                     <a:bodyPr/>
                     <a:lstStyle/>
                     <a:p>
-                      <a:pPr indent="0" marL="0">
+                      <a:pPr marL="0" indent="0">
                         <a:buNone/>
                       </a:pPr>
                       <a:r>
@@ -4912,7 +4597,7 @@
                       </a:endParaRPr>
                     </a:p>
                   </a:txBody>
-                  <a:tcPr marL="91440" marR="91440" marT="45720" marB="45720" anchor="ctr">
+                  <a:tcPr anchor="ctr">
                     <a:lnL w="12700" cap="flat" cmpd="sng" algn="ctr">
                       <a:solidFill>
                         <a:srgbClr val="EEEEEE"/>
@@ -4959,7 +4644,7 @@
                     <a:bodyPr/>
                     <a:lstStyle/>
                     <a:p>
-                      <a:pPr indent="0" marL="0">
+                      <a:pPr marL="0" indent="0">
                         <a:buNone/>
                       </a:pPr>
                       <a:r>
@@ -4980,7 +4665,7 @@
                       </a:endParaRPr>
                     </a:p>
                   </a:txBody>
-                  <a:tcPr marL="91440" marR="91440" marT="45720" marB="45720" anchor="ctr">
+                  <a:tcPr anchor="ctr">
                     <a:lnL w="12700" cap="flat" cmpd="sng" algn="ctr">
                       <a:solidFill>
                         <a:srgbClr val="EEEEEE"/>
@@ -5022,6 +4707,11 @@
                     </a:solidFill>
                   </a:tcPr>
                 </a:tc>
+                <a:extLst>
+                  <a:ext uri="{0D108BD9-81ED-4DB2-BD59-A6C34878D82A}">
+                    <a16:rowId xmlns:a16="http://schemas.microsoft.com/office/drawing/2014/main" val="10002"/>
+                  </a:ext>
+                </a:extLst>
               </a:tr>
               <a:tr h="548640">
                 <a:tc>
@@ -5029,7 +4719,7 @@
                     <a:bodyPr/>
                     <a:lstStyle/>
                     <a:p>
-                      <a:pPr indent="0" marL="0">
+                      <a:pPr marL="0" indent="0">
                         <a:buNone/>
                       </a:pPr>
                       <a:r>
@@ -5050,7 +4740,7 @@
                       </a:endParaRPr>
                     </a:p>
                   </a:txBody>
-                  <a:tcPr marL="91440" marR="91440" marT="45720" marB="45720" anchor="ctr">
+                  <a:tcPr anchor="ctr">
                     <a:lnL w="12700" cap="flat" cmpd="sng" algn="ctr">
                       <a:solidFill>
                         <a:srgbClr val="EEEEEE"/>
@@ -5097,7 +4787,7 @@
                     <a:bodyPr/>
                     <a:lstStyle/>
                     <a:p>
-                      <a:pPr indent="0" marL="0">
+                      <a:pPr marL="0" indent="0">
                         <a:buNone/>
                       </a:pPr>
                       <a:r>
@@ -5118,7 +4808,7 @@
                       </a:endParaRPr>
                     </a:p>
                   </a:txBody>
-                  <a:tcPr marL="91440" marR="91440" marT="45720" marB="45720" anchor="ctr">
+                  <a:tcPr anchor="ctr">
                     <a:lnL w="12700" cap="flat" cmpd="sng" algn="ctr">
                       <a:solidFill>
                         <a:srgbClr val="EEEEEE"/>
@@ -5160,6 +4850,11 @@
                     </a:solidFill>
                   </a:tcPr>
                 </a:tc>
+                <a:extLst>
+                  <a:ext uri="{0D108BD9-81ED-4DB2-BD59-A6C34878D82A}">
+                    <a16:rowId xmlns:a16="http://schemas.microsoft.com/office/drawing/2014/main" val="10003"/>
+                  </a:ext>
+                </a:extLst>
               </a:tr>
             </a:tbl>
           </a:graphicData>
@@ -5214,6 +4909,13 @@
             <a:prstDash val="solid"/>
           </a:ln>
         </p:spPr>
+        <p:txBody>
+          <a:bodyPr/>
+          <a:lstStyle/>
+          <a:p>
+            <a:endParaRPr lang="es-ES"/>
+          </a:p>
+        </p:txBody>
       </p:sp>
       <p:sp>
         <p:nvSpPr>
@@ -5236,7 +4938,7 @@
           <a:bodyPr wrap="square" rtlCol="0" anchor="ctr"/>
           <a:lstStyle/>
           <a:p>
-            <a:pPr indent="0" marL="0">
+            <a:pPr marL="0" indent="0">
               <a:buNone/>
             </a:pPr>
             <a:r>
@@ -5275,7 +4977,7 @@
           <a:bodyPr wrap="square" rtlCol="0" anchor="ctr"/>
           <a:lstStyle/>
           <a:p>
-            <a:pPr algn="r" indent="0" marL="0">
+            <a:pPr marL="0" indent="0" algn="r">
               <a:buNone/>
             </a:pPr>
             <a:r>
@@ -5317,6 +5019,13 @@
             <a:prstDash val="solid"/>
           </a:ln>
         </p:spPr>
+        <p:txBody>
+          <a:bodyPr/>
+          <a:lstStyle/>
+          <a:p>
+            <a:endParaRPr lang="es-ES"/>
+          </a:p>
+        </p:txBody>
       </p:sp>
       <p:sp>
         <p:nvSpPr>
@@ -5342,6 +5051,13 @@
             <a:prstDash val="solid"/>
           </a:ln>
         </p:spPr>
+        <p:txBody>
+          <a:bodyPr/>
+          <a:lstStyle/>
+          <a:p>
+            <a:endParaRPr lang="es-ES"/>
+          </a:p>
+        </p:txBody>
       </p:sp>
       <p:sp>
         <p:nvSpPr>
@@ -5364,7 +5080,7 @@
           <a:bodyPr wrap="square" rtlCol="0" anchor="t"/>
           <a:lstStyle/>
           <a:p>
-            <a:pPr indent="0" marL="0">
+            <a:pPr marL="0" indent="0">
               <a:buNone/>
             </a:pPr>
             <a:r>
@@ -5398,16 +5114,34 @@
         </p:nvGraphicFramePr>
         <p:xfrm>
           <a:off x="548640" y="2331720"/>
-          <a:ext cx="11091672" cy="914400"/>
+          <a:ext cx="11091672" cy="2743200"/>
         </p:xfrm>
         <a:graphic>
           <a:graphicData uri="http://schemas.openxmlformats.org/drawingml/2006/table">
             <a:tbl>
               <a:tblPr/>
               <a:tblGrid>
-                <a:gridCol w="1663751"/>
-                <a:gridCol w="5545836"/>
-                <a:gridCol w="3882085"/>
+                <a:gridCol w="1663751">
+                  <a:extLst>
+                    <a:ext uri="{9D8B030D-6E8A-4147-A177-3AD203B41FA5}">
+                      <a16:colId xmlns:a16="http://schemas.microsoft.com/office/drawing/2014/main" val="20000"/>
+                    </a:ext>
+                  </a:extLst>
+                </a:gridCol>
+                <a:gridCol w="5545836">
+                  <a:extLst>
+                    <a:ext uri="{9D8B030D-6E8A-4147-A177-3AD203B41FA5}">
+                      <a16:colId xmlns:a16="http://schemas.microsoft.com/office/drawing/2014/main" val="20001"/>
+                    </a:ext>
+                  </a:extLst>
+                </a:gridCol>
+                <a:gridCol w="3882085">
+                  <a:extLst>
+                    <a:ext uri="{9D8B030D-6E8A-4147-A177-3AD203B41FA5}">
+                      <a16:colId xmlns:a16="http://schemas.microsoft.com/office/drawing/2014/main" val="20002"/>
+                    </a:ext>
+                  </a:extLst>
+                </a:gridCol>
               </a:tblGrid>
               <a:tr h="548640">
                 <a:tc>
@@ -5415,7 +5149,7 @@
                     <a:bodyPr/>
                     <a:lstStyle/>
                     <a:p>
-                      <a:pPr algn="ctr" indent="0" marL="0">
+                      <a:pPr marL="0" indent="0" algn="ctr">
                         <a:buNone/>
                       </a:pPr>
                       <a:r>
@@ -5436,7 +5170,7 @@
                       </a:endParaRPr>
                     </a:p>
                   </a:txBody>
-                  <a:tcPr marL="91440" marR="91440" marT="45720" marB="45720" anchor="ctr">
+                  <a:tcPr anchor="ctr">
                     <a:lnL w="12700" cap="flat" cmpd="sng" algn="ctr">
                       <a:solidFill>
                         <a:srgbClr val="EEEEEE"/>
@@ -5483,7 +5217,7 @@
                     <a:bodyPr/>
                     <a:lstStyle/>
                     <a:p>
-                      <a:pPr algn="ctr" indent="0" marL="0">
+                      <a:pPr marL="0" indent="0" algn="ctr">
                         <a:buNone/>
                       </a:pPr>
                       <a:r>
@@ -5504,7 +5238,7 @@
                       </a:endParaRPr>
                     </a:p>
                   </a:txBody>
-                  <a:tcPr marL="91440" marR="91440" marT="45720" marB="45720" anchor="ctr">
+                  <a:tcPr anchor="ctr">
                     <a:lnL w="12700" cap="flat" cmpd="sng" algn="ctr">
                       <a:solidFill>
                         <a:srgbClr val="EEEEEE"/>
@@ -5551,7 +5285,7 @@
                     <a:bodyPr/>
                     <a:lstStyle/>
                     <a:p>
-                      <a:pPr algn="ctr" indent="0" marL="0">
+                      <a:pPr marL="0" indent="0" algn="ctr">
                         <a:buNone/>
                       </a:pPr>
                       <a:r>
@@ -5572,7 +5306,7 @@
                       </a:endParaRPr>
                     </a:p>
                   </a:txBody>
-                  <a:tcPr marL="91440" marR="91440" marT="45720" marB="45720" anchor="ctr">
+                  <a:tcPr anchor="ctr">
                     <a:lnL w="12700" cap="flat" cmpd="sng" algn="ctr">
                       <a:solidFill>
                         <a:srgbClr val="EEEEEE"/>
@@ -5614,6 +5348,11 @@
                     </a:solidFill>
                   </a:tcPr>
                 </a:tc>
+                <a:extLst>
+                  <a:ext uri="{0D108BD9-81ED-4DB2-BD59-A6C34878D82A}">
+                    <a16:rowId xmlns:a16="http://schemas.microsoft.com/office/drawing/2014/main" val="10000"/>
+                  </a:ext>
+                </a:extLst>
               </a:tr>
               <a:tr h="548640">
                 <a:tc>
@@ -5621,7 +5360,7 @@
                     <a:bodyPr/>
                     <a:lstStyle/>
                     <a:p>
-                      <a:pPr indent="0" marL="0">
+                      <a:pPr marL="0" indent="0">
                         <a:buNone/>
                       </a:pPr>
                       <a:r>
@@ -5642,7 +5381,7 @@
                       </a:endParaRPr>
                     </a:p>
                   </a:txBody>
-                  <a:tcPr marL="91440" marR="91440" marT="45720" marB="45720" anchor="ctr">
+                  <a:tcPr anchor="ctr">
                     <a:lnL w="12700" cap="flat" cmpd="sng" algn="ctr">
                       <a:solidFill>
                         <a:srgbClr val="EEEEEE"/>
@@ -5689,7 +5428,7 @@
                     <a:bodyPr/>
                     <a:lstStyle/>
                     <a:p>
-                      <a:pPr indent="0" marL="0">
+                      <a:pPr marL="0" indent="0">
                         <a:buNone/>
                       </a:pPr>
                       <a:r>
@@ -5710,7 +5449,7 @@
                       </a:endParaRPr>
                     </a:p>
                   </a:txBody>
-                  <a:tcPr marL="91440" marR="91440" marT="45720" marB="45720" anchor="ctr">
+                  <a:tcPr anchor="ctr">
                     <a:lnL w="12700" cap="flat" cmpd="sng" algn="ctr">
                       <a:solidFill>
                         <a:srgbClr val="EEEEEE"/>
@@ -5757,7 +5496,7 @@
                     <a:bodyPr/>
                     <a:lstStyle/>
                     <a:p>
-                      <a:pPr indent="0" marL="0">
+                      <a:pPr marL="0" indent="0">
                         <a:buNone/>
                       </a:pPr>
                       <a:r>
@@ -5778,7 +5517,7 @@
                       </a:endParaRPr>
                     </a:p>
                   </a:txBody>
-                  <a:tcPr marL="91440" marR="91440" marT="45720" marB="45720" anchor="ctr">
+                  <a:tcPr anchor="ctr">
                     <a:lnL w="12700" cap="flat" cmpd="sng" algn="ctr">
                       <a:solidFill>
                         <a:srgbClr val="EEEEEE"/>
@@ -5820,6 +5559,11 @@
                     </a:solidFill>
                   </a:tcPr>
                 </a:tc>
+                <a:extLst>
+                  <a:ext uri="{0D108BD9-81ED-4DB2-BD59-A6C34878D82A}">
+                    <a16:rowId xmlns:a16="http://schemas.microsoft.com/office/drawing/2014/main" val="10001"/>
+                  </a:ext>
+                </a:extLst>
               </a:tr>
               <a:tr h="548640">
                 <a:tc>
@@ -5827,7 +5571,7 @@
                     <a:bodyPr/>
                     <a:lstStyle/>
                     <a:p>
-                      <a:pPr indent="0" marL="0">
+                      <a:pPr marL="0" indent="0">
                         <a:buNone/>
                       </a:pPr>
                       <a:r>
@@ -5848,7 +5592,7 @@
                       </a:endParaRPr>
                     </a:p>
                   </a:txBody>
-                  <a:tcPr marL="91440" marR="91440" marT="45720" marB="45720" anchor="ctr">
+                  <a:tcPr anchor="ctr">
                     <a:lnL w="12700" cap="flat" cmpd="sng" algn="ctr">
                       <a:solidFill>
                         <a:srgbClr val="EEEEEE"/>
@@ -5895,7 +5639,7 @@
                     <a:bodyPr/>
                     <a:lstStyle/>
                     <a:p>
-                      <a:pPr indent="0" marL="0">
+                      <a:pPr marL="0" indent="0">
                         <a:buNone/>
                       </a:pPr>
                       <a:r>
@@ -5916,7 +5660,7 @@
                       </a:endParaRPr>
                     </a:p>
                   </a:txBody>
-                  <a:tcPr marL="91440" marR="91440" marT="45720" marB="45720" anchor="ctr">
+                  <a:tcPr anchor="ctr">
                     <a:lnL w="12700" cap="flat" cmpd="sng" algn="ctr">
                       <a:solidFill>
                         <a:srgbClr val="EEEEEE"/>
@@ -5963,7 +5707,7 @@
                     <a:bodyPr/>
                     <a:lstStyle/>
                     <a:p>
-                      <a:pPr indent="0" marL="0">
+                      <a:pPr marL="0" indent="0">
                         <a:buNone/>
                       </a:pPr>
                       <a:r>
@@ -5984,7 +5728,7 @@
                       </a:endParaRPr>
                     </a:p>
                   </a:txBody>
-                  <a:tcPr marL="91440" marR="91440" marT="45720" marB="45720" anchor="ctr">
+                  <a:tcPr anchor="ctr">
                     <a:lnL w="12700" cap="flat" cmpd="sng" algn="ctr">
                       <a:solidFill>
                         <a:srgbClr val="EEEEEE"/>
@@ -6026,6 +5770,11 @@
                     </a:solidFill>
                   </a:tcPr>
                 </a:tc>
+                <a:extLst>
+                  <a:ext uri="{0D108BD9-81ED-4DB2-BD59-A6C34878D82A}">
+                    <a16:rowId xmlns:a16="http://schemas.microsoft.com/office/drawing/2014/main" val="10002"/>
+                  </a:ext>
+                </a:extLst>
               </a:tr>
               <a:tr h="548640">
                 <a:tc>
@@ -6033,7 +5782,7 @@
                     <a:bodyPr/>
                     <a:lstStyle/>
                     <a:p>
-                      <a:pPr indent="0" marL="0">
+                      <a:pPr marL="0" indent="0">
                         <a:buNone/>
                       </a:pPr>
                       <a:r>
@@ -6054,7 +5803,7 @@
                       </a:endParaRPr>
                     </a:p>
                   </a:txBody>
-                  <a:tcPr marL="91440" marR="91440" marT="45720" marB="45720" anchor="ctr">
+                  <a:tcPr anchor="ctr">
                     <a:lnL w="12700" cap="flat" cmpd="sng" algn="ctr">
                       <a:solidFill>
                         <a:srgbClr val="EEEEEE"/>
@@ -6101,7 +5850,7 @@
                     <a:bodyPr/>
                     <a:lstStyle/>
                     <a:p>
-                      <a:pPr indent="0" marL="0">
+                      <a:pPr marL="0" indent="0">
                         <a:buNone/>
                       </a:pPr>
                       <a:r>
@@ -6122,7 +5871,7 @@
                       </a:endParaRPr>
                     </a:p>
                   </a:txBody>
-                  <a:tcPr marL="91440" marR="91440" marT="45720" marB="45720" anchor="ctr">
+                  <a:tcPr anchor="ctr">
                     <a:lnL w="12700" cap="flat" cmpd="sng" algn="ctr">
                       <a:solidFill>
                         <a:srgbClr val="EEEEEE"/>
@@ -6169,7 +5918,7 @@
                     <a:bodyPr/>
                     <a:lstStyle/>
                     <a:p>
-                      <a:pPr indent="0" marL="0">
+                      <a:pPr marL="0" indent="0">
                         <a:buNone/>
                       </a:pPr>
                       <a:r>
@@ -6190,7 +5939,7 @@
                       </a:endParaRPr>
                     </a:p>
                   </a:txBody>
-                  <a:tcPr marL="91440" marR="91440" marT="45720" marB="45720" anchor="ctr">
+                  <a:tcPr anchor="ctr">
                     <a:lnL w="12700" cap="flat" cmpd="sng" algn="ctr">
                       <a:solidFill>
                         <a:srgbClr val="EEEEEE"/>
@@ -6232,6 +5981,11 @@
                     </a:solidFill>
                   </a:tcPr>
                 </a:tc>
+                <a:extLst>
+                  <a:ext uri="{0D108BD9-81ED-4DB2-BD59-A6C34878D82A}">
+                    <a16:rowId xmlns:a16="http://schemas.microsoft.com/office/drawing/2014/main" val="10003"/>
+                  </a:ext>
+                </a:extLst>
               </a:tr>
               <a:tr h="548640">
                 <a:tc>
@@ -6239,7 +5993,7 @@
                     <a:bodyPr/>
                     <a:lstStyle/>
                     <a:p>
-                      <a:pPr indent="0" marL="0">
+                      <a:pPr marL="0" indent="0">
                         <a:buNone/>
                       </a:pPr>
                       <a:r>
@@ -6260,7 +6014,7 @@
                       </a:endParaRPr>
                     </a:p>
                   </a:txBody>
-                  <a:tcPr marL="91440" marR="91440" marT="45720" marB="45720" anchor="ctr">
+                  <a:tcPr anchor="ctr">
                     <a:lnL w="12700" cap="flat" cmpd="sng" algn="ctr">
                       <a:solidFill>
                         <a:srgbClr val="EEEEEE"/>
@@ -6307,7 +6061,7 @@
                     <a:bodyPr/>
                     <a:lstStyle/>
                     <a:p>
-                      <a:pPr indent="0" marL="0">
+                      <a:pPr marL="0" indent="0">
                         <a:buNone/>
                       </a:pPr>
                       <a:r>
@@ -6328,7 +6082,7 @@
                       </a:endParaRPr>
                     </a:p>
                   </a:txBody>
-                  <a:tcPr marL="91440" marR="91440" marT="45720" marB="45720" anchor="ctr">
+                  <a:tcPr anchor="ctr">
                     <a:lnL w="12700" cap="flat" cmpd="sng" algn="ctr">
                       <a:solidFill>
                         <a:srgbClr val="EEEEEE"/>
@@ -6375,7 +6129,7 @@
                     <a:bodyPr/>
                     <a:lstStyle/>
                     <a:p>
-                      <a:pPr indent="0" marL="0">
+                      <a:pPr marL="0" indent="0">
                         <a:buNone/>
                       </a:pPr>
                       <a:r>
@@ -6396,7 +6150,7 @@
                       </a:endParaRPr>
                     </a:p>
                   </a:txBody>
-                  <a:tcPr marL="91440" marR="91440" marT="45720" marB="45720" anchor="ctr">
+                  <a:tcPr anchor="ctr">
                     <a:lnL w="12700" cap="flat" cmpd="sng" algn="ctr">
                       <a:solidFill>
                         <a:srgbClr val="EEEEEE"/>
@@ -6438,6 +6192,11 @@
                     </a:solidFill>
                   </a:tcPr>
                 </a:tc>
+                <a:extLst>
+                  <a:ext uri="{0D108BD9-81ED-4DB2-BD59-A6C34878D82A}">
+                    <a16:rowId xmlns:a16="http://schemas.microsoft.com/office/drawing/2014/main" val="10004"/>
+                  </a:ext>
+                </a:extLst>
               </a:tr>
             </a:tbl>
           </a:graphicData>
@@ -6492,6 +6251,13 @@
             <a:prstDash val="solid"/>
           </a:ln>
         </p:spPr>
+        <p:txBody>
+          <a:bodyPr/>
+          <a:lstStyle/>
+          <a:p>
+            <a:endParaRPr lang="es-ES"/>
+          </a:p>
+        </p:txBody>
       </p:sp>
       <p:sp>
         <p:nvSpPr>
@@ -6514,7 +6280,7 @@
           <a:bodyPr wrap="square" rtlCol="0" anchor="ctr"/>
           <a:lstStyle/>
           <a:p>
-            <a:pPr indent="0" marL="0">
+            <a:pPr marL="0" indent="0">
               <a:buNone/>
             </a:pPr>
             <a:r>
@@ -6553,7 +6319,7 @@
           <a:bodyPr wrap="square" rtlCol="0" anchor="ctr"/>
           <a:lstStyle/>
           <a:p>
-            <a:pPr algn="r" indent="0" marL="0">
+            <a:pPr marL="0" indent="0" algn="r">
               <a:buNone/>
             </a:pPr>
             <a:r>
@@ -6595,6 +6361,13 @@
             <a:prstDash val="solid"/>
           </a:ln>
         </p:spPr>
+        <p:txBody>
+          <a:bodyPr/>
+          <a:lstStyle/>
+          <a:p>
+            <a:endParaRPr lang="es-ES"/>
+          </a:p>
+        </p:txBody>
       </p:sp>
       <p:sp>
         <p:nvSpPr>
@@ -6617,7 +6390,7 @@
           <a:bodyPr wrap="square" rtlCol="0" anchor="t"/>
           <a:lstStyle/>
           <a:p>
-            <a:pPr indent="0" marL="0">
+            <a:pPr marL="0" indent="0">
               <a:buNone/>
             </a:pPr>
             <a:r>
@@ -6635,7 +6408,7 @@
             <a:endParaRPr lang="en-US" sz="1950" dirty="0"/>
           </a:p>
           <a:p>
-            <a:pPr indent="0" marL="0">
+            <a:pPr marL="0" indent="0">
               <a:buNone/>
             </a:pPr>
             <a:r>
@@ -6652,13 +6425,13 @@
             <a:endParaRPr lang="en-US" sz="1950" dirty="0"/>
           </a:p>
           <a:p>
-            <a:pPr indent="0" marL="0">
+            <a:pPr marL="0" indent="0">
               <a:buNone/>
             </a:pPr>
             <a:endParaRPr lang="en-US" sz="1950" dirty="0"/>
           </a:p>
           <a:p>
-            <a:pPr indent="0" marL="0">
+            <a:pPr marL="0" indent="0">
               <a:buNone/>
             </a:pPr>
             <a:r>
@@ -6725,6 +6498,13 @@
             <a:prstDash val="solid"/>
           </a:ln>
         </p:spPr>
+        <p:txBody>
+          <a:bodyPr/>
+          <a:lstStyle/>
+          <a:p>
+            <a:endParaRPr lang="es-ES"/>
+          </a:p>
+        </p:txBody>
       </p:sp>
       <p:sp>
         <p:nvSpPr>
@@ -6747,7 +6527,7 @@
           <a:bodyPr wrap="square" rtlCol="0" anchor="ctr"/>
           <a:lstStyle/>
           <a:p>
-            <a:pPr indent="0" marL="0">
+            <a:pPr marL="0" indent="0">
               <a:buNone/>
             </a:pPr>
             <a:r>
@@ -6786,7 +6566,7 @@
           <a:bodyPr wrap="square" rtlCol="0" anchor="ctr"/>
           <a:lstStyle/>
           <a:p>
-            <a:pPr algn="r" indent="0" marL="0">
+            <a:pPr marL="0" indent="0" algn="r">
               <a:buNone/>
             </a:pPr>
             <a:r>
@@ -6828,6 +6608,13 @@
             <a:prstDash val="solid"/>
           </a:ln>
         </p:spPr>
+        <p:txBody>
+          <a:bodyPr/>
+          <a:lstStyle/>
+          <a:p>
+            <a:endParaRPr lang="es-ES"/>
+          </a:p>
+        </p:txBody>
       </p:sp>
       <p:sp>
         <p:nvSpPr>
@@ -6850,7 +6637,7 @@
           <a:bodyPr wrap="square" rtlCol="0" anchor="ctr"/>
           <a:lstStyle/>
           <a:p>
-            <a:pPr indent="0" marL="0">
+            <a:pPr marL="0" indent="0">
               <a:buNone/>
             </a:pPr>
             <a:r>
@@ -6917,6 +6704,13 @@
             <a:prstDash val="solid"/>
           </a:ln>
         </p:spPr>
+        <p:txBody>
+          <a:bodyPr/>
+          <a:lstStyle/>
+          <a:p>
+            <a:endParaRPr lang="es-ES"/>
+          </a:p>
+        </p:txBody>
       </p:sp>
       <p:sp>
         <p:nvSpPr>
@@ -6939,7 +6733,7 @@
           <a:bodyPr wrap="square" rtlCol="0" anchor="ctr"/>
           <a:lstStyle/>
           <a:p>
-            <a:pPr indent="0" marL="0">
+            <a:pPr marL="0" indent="0">
               <a:buNone/>
             </a:pPr>
             <a:r>
@@ -6978,7 +6772,7 @@
           <a:bodyPr wrap="square" rtlCol="0" anchor="ctr"/>
           <a:lstStyle/>
           <a:p>
-            <a:pPr algn="r" indent="0" marL="0">
+            <a:pPr marL="0" indent="0" algn="r">
               <a:buNone/>
             </a:pPr>
             <a:r>
@@ -6998,22 +6792,22 @@
       </p:sp>
       <p:pic>
         <p:nvPicPr>
-          <p:cNvPr id="5" name="Image 0" descr="C:/Users/Aitor/docxgen/img/psp-t2-jwt-flujo-login.png">    </p:cNvPr>
+          <p:cNvPr id="5" name="Image 0" descr="C:/Users/Aitor/docxgen/img/psp-t2-jwt-flujo-login.png"/>
           <p:cNvPicPr>
             <a:picLocks noChangeAspect="1"/>
           </p:cNvPicPr>
           <p:nvPr/>
         </p:nvPicPr>
         <p:blipFill>
-          <a:blip r:embed="rId1"/>
+          <a:blip r:embed="rId3"/>
           <a:stretch>
             <a:fillRect/>
           </a:stretch>
         </p:blipFill>
         <p:spPr>
           <a:xfrm>
-            <a:off x="577466" y="1508760"/>
-            <a:ext cx="11034021" cy="3931920"/>
+            <a:off x="82944" y="1508759"/>
+            <a:ext cx="11869298" cy="4229567"/>
           </a:xfrm>
           <a:prstGeom prst="rect">
             <a:avLst/>
@@ -7069,6 +6863,13 @@
             <a:prstDash val="solid"/>
           </a:ln>
         </p:spPr>
+        <p:txBody>
+          <a:bodyPr/>
+          <a:lstStyle/>
+          <a:p>
+            <a:endParaRPr lang="es-ES"/>
+          </a:p>
+        </p:txBody>
       </p:sp>
       <p:sp>
         <p:nvSpPr>
@@ -7091,7 +6892,7 @@
           <a:bodyPr wrap="square" rtlCol="0" anchor="ctr"/>
           <a:lstStyle/>
           <a:p>
-            <a:pPr indent="0" marL="0">
+            <a:pPr marL="0" indent="0">
               <a:buNone/>
             </a:pPr>
             <a:r>
@@ -7130,7 +6931,7 @@
           <a:bodyPr wrap="square" rtlCol="0" anchor="ctr"/>
           <a:lstStyle/>
           <a:p>
-            <a:pPr algn="r" indent="0" marL="0">
+            <a:pPr marL="0" indent="0" algn="r">
               <a:buNone/>
             </a:pPr>
             <a:r>
@@ -7150,22 +6951,22 @@
       </p:sp>
       <p:pic>
         <p:nvPicPr>
-          <p:cNvPr id="5" name="Image 0" descr="C:/Users/Aitor/docxgen/img/psp-t2-jwt-flujo-validacion.png">    </p:cNvPr>
+          <p:cNvPr id="5" name="Image 0" descr="C:/Users/Aitor/docxgen/img/psp-t2-jwt-flujo-validacion.png"/>
           <p:cNvPicPr>
             <a:picLocks noChangeAspect="1"/>
           </p:cNvPicPr>
           <p:nvPr/>
         </p:nvPicPr>
         <p:blipFill>
-          <a:blip r:embed="rId1"/>
+          <a:blip r:embed="rId3"/>
           <a:stretch>
             <a:fillRect/>
           </a:stretch>
         </p:blipFill>
         <p:spPr>
           <a:xfrm>
-            <a:off x="627709" y="2194560"/>
-            <a:ext cx="10933533" cy="2971800"/>
+            <a:off x="37262" y="2034073"/>
+            <a:ext cx="12117859" cy="3293707"/>
           </a:xfrm>
           <a:prstGeom prst="rect">
             <a:avLst/>
@@ -7221,6 +7022,13 @@
             <a:prstDash val="solid"/>
           </a:ln>
         </p:spPr>
+        <p:txBody>
+          <a:bodyPr/>
+          <a:lstStyle/>
+          <a:p>
+            <a:endParaRPr lang="es-ES"/>
+          </a:p>
+        </p:txBody>
       </p:sp>
       <p:sp>
         <p:nvSpPr>
@@ -7243,7 +7051,7 @@
           <a:bodyPr wrap="square" rtlCol="0" anchor="ctr"/>
           <a:lstStyle/>
           <a:p>
-            <a:pPr indent="0" marL="0">
+            <a:pPr marL="0" indent="0">
               <a:buNone/>
             </a:pPr>
             <a:r>
@@ -7282,7 +7090,7 @@
           <a:bodyPr wrap="square" rtlCol="0" anchor="ctr"/>
           <a:lstStyle/>
           <a:p>
-            <a:pPr algn="r" indent="0" marL="0">
+            <a:pPr marL="0" indent="0" algn="r">
               <a:buNone/>
             </a:pPr>
             <a:r>
@@ -7324,6 +7132,13 @@
             <a:prstDash val="solid"/>
           </a:ln>
         </p:spPr>
+        <p:txBody>
+          <a:bodyPr/>
+          <a:lstStyle/>
+          <a:p>
+            <a:endParaRPr lang="es-ES"/>
+          </a:p>
+        </p:txBody>
       </p:sp>
       <p:sp>
         <p:nvSpPr>
@@ -7346,7 +7161,7 @@
           <a:bodyPr wrap="square" rtlCol="0" anchor="ctr"/>
           <a:lstStyle/>
           <a:p>
-            <a:pPr indent="0" marL="0">
+            <a:pPr marL="0" indent="0">
               <a:buNone/>
             </a:pPr>
             <a:r>
@@ -7385,7 +7200,7 @@
           <a:bodyPr wrap="square" rtlCol="0" anchor="t"/>
           <a:lstStyle/>
           <a:p>
-            <a:pPr indent="0" marL="0">
+            <a:pPr marL="0" indent="0">
               <a:buNone/>
             </a:pPr>
             <a:r>
@@ -7452,6 +7267,13 @@
             <a:prstDash val="solid"/>
           </a:ln>
         </p:spPr>
+        <p:txBody>
+          <a:bodyPr/>
+          <a:lstStyle/>
+          <a:p>
+            <a:endParaRPr lang="es-ES"/>
+          </a:p>
+        </p:txBody>
       </p:sp>
       <p:sp>
         <p:nvSpPr>
@@ -7474,7 +7296,7 @@
           <a:bodyPr wrap="square" rtlCol="0" anchor="ctr"/>
           <a:lstStyle/>
           <a:p>
-            <a:pPr indent="0" marL="0">
+            <a:pPr marL="0" indent="0">
               <a:buNone/>
             </a:pPr>
             <a:r>
@@ -7513,7 +7335,7 @@
           <a:bodyPr wrap="square" rtlCol="0" anchor="ctr"/>
           <a:lstStyle/>
           <a:p>
-            <a:pPr algn="r" indent="0" marL="0">
+            <a:pPr marL="0" indent="0" algn="r">
               <a:buNone/>
             </a:pPr>
             <a:r>
@@ -7552,7 +7374,7 @@
           <a:bodyPr wrap="square" rtlCol="0" anchor="t"/>
           <a:lstStyle/>
           <a:p>
-            <a:pPr indent="0" marL="0">
+            <a:pPr marL="0" indent="0">
               <a:buNone/>
             </a:pPr>
             <a:r>
@@ -7594,6 +7416,13 @@
             <a:prstDash val="solid"/>
           </a:ln>
         </p:spPr>
+        <p:txBody>
+          <a:bodyPr/>
+          <a:lstStyle/>
+          <a:p>
+            <a:endParaRPr lang="es-ES"/>
+          </a:p>
+        </p:txBody>
       </p:sp>
       <p:sp>
         <p:nvSpPr>
@@ -7619,6 +7448,13 @@
             <a:prstDash val="solid"/>
           </a:ln>
         </p:spPr>
+        <p:txBody>
+          <a:bodyPr/>
+          <a:lstStyle/>
+          <a:p>
+            <a:endParaRPr lang="es-ES"/>
+          </a:p>
+        </p:txBody>
       </p:sp>
       <p:sp>
         <p:nvSpPr>
@@ -7641,7 +7477,7 @@
           <a:bodyPr wrap="square" rtlCol="0" anchor="t"/>
           <a:lstStyle/>
           <a:p>
-            <a:pPr indent="0" marL="0">
+            <a:pPr marL="0" indent="0">
               <a:buNone/>
             </a:pPr>
             <a:r>
@@ -7658,7 +7494,7 @@
             <a:endParaRPr lang="en-US" sz="1500" dirty="0"/>
           </a:p>
           <a:p>
-            <a:pPr indent="0" marL="0">
+            <a:pPr marL="0" indent="0">
               <a:buNone/>
             </a:pPr>
             <a:r>
@@ -7675,7 +7511,7 @@
             <a:endParaRPr lang="en-US" sz="1500" dirty="0"/>
           </a:p>
           <a:p>
-            <a:pPr indent="0" marL="0">
+            <a:pPr marL="0" indent="0">
               <a:buNone/>
             </a:pPr>
             <a:r>
@@ -7692,7 +7528,7 @@
             <a:endParaRPr lang="en-US" sz="1500" dirty="0"/>
           </a:p>
           <a:p>
-            <a:pPr indent="0" marL="0">
+            <a:pPr marL="0" indent="0">
               <a:buNone/>
             </a:pPr>
             <a:r>
@@ -7734,6 +7570,13 @@
             <a:prstDash val="solid"/>
           </a:ln>
         </p:spPr>
+        <p:txBody>
+          <a:bodyPr/>
+          <a:lstStyle/>
+          <a:p>
+            <a:endParaRPr lang="es-ES"/>
+          </a:p>
+        </p:txBody>
       </p:sp>
       <p:sp>
         <p:nvSpPr>
@@ -7756,7 +7599,7 @@
           <a:bodyPr wrap="square" rtlCol="0" anchor="ctr"/>
           <a:lstStyle/>
           <a:p>
-            <a:pPr indent="0" marL="0">
+            <a:pPr marL="0" indent="0">
               <a:buNone/>
             </a:pPr>
             <a:r>
@@ -7823,6 +7666,13 @@
             <a:prstDash val="solid"/>
           </a:ln>
         </p:spPr>
+        <p:txBody>
+          <a:bodyPr/>
+          <a:lstStyle/>
+          <a:p>
+            <a:endParaRPr lang="es-ES"/>
+          </a:p>
+        </p:txBody>
       </p:sp>
       <p:sp>
         <p:nvSpPr>
@@ -7845,7 +7695,7 @@
           <a:bodyPr wrap="square" rtlCol="0" anchor="ctr"/>
           <a:lstStyle/>
           <a:p>
-            <a:pPr indent="0" marL="0">
+            <a:pPr marL="0" indent="0">
               <a:buNone/>
             </a:pPr>
             <a:r>
@@ -7884,7 +7734,7 @@
           <a:bodyPr wrap="square" rtlCol="0" anchor="ctr"/>
           <a:lstStyle/>
           <a:p>
-            <a:pPr algn="r" indent="0" marL="0">
+            <a:pPr marL="0" indent="0" algn="r">
               <a:buNone/>
             </a:pPr>
             <a:r>
@@ -7926,6 +7776,13 @@
             <a:prstDash val="solid"/>
           </a:ln>
         </p:spPr>
+        <p:txBody>
+          <a:bodyPr/>
+          <a:lstStyle/>
+          <a:p>
+            <a:endParaRPr lang="es-ES"/>
+          </a:p>
+        </p:txBody>
       </p:sp>
       <p:sp>
         <p:nvSpPr>
@@ -7951,6 +7808,13 @@
             <a:prstDash val="solid"/>
           </a:ln>
         </p:spPr>
+        <p:txBody>
+          <a:bodyPr/>
+          <a:lstStyle/>
+          <a:p>
+            <a:endParaRPr lang="es-ES"/>
+          </a:p>
+        </p:txBody>
       </p:sp>
       <p:sp>
         <p:nvSpPr>
@@ -7973,7 +7837,7 @@
           <a:bodyPr wrap="square" rtlCol="0" anchor="t"/>
           <a:lstStyle/>
           <a:p>
-            <a:pPr indent="0" marL="0">
+            <a:pPr marL="0" indent="0">
               <a:buNone/>
             </a:pPr>
             <a:r>
@@ -7990,7 +7854,7 @@
             <a:endParaRPr lang="en-US" sz="1300" dirty="0"/>
           </a:p>
           <a:p>
-            <a:pPr indent="0" marL="0">
+            <a:pPr marL="0" indent="0">
               <a:buNone/>
             </a:pPr>
             <a:r>
@@ -8007,13 +7871,13 @@
             <a:endParaRPr lang="en-US" sz="1300" dirty="0"/>
           </a:p>
           <a:p>
-            <a:pPr indent="0" marL="0">
+            <a:pPr marL="0" indent="0">
               <a:buNone/>
             </a:pPr>
             <a:endParaRPr lang="en-US" sz="1300" dirty="0"/>
           </a:p>
           <a:p>
-            <a:pPr indent="0" marL="0">
+            <a:pPr marL="0" indent="0">
               <a:buNone/>
             </a:pPr>
             <a:r>
@@ -8030,7 +7894,7 @@
             <a:endParaRPr lang="en-US" sz="1300" dirty="0"/>
           </a:p>
           <a:p>
-            <a:pPr indent="0" marL="0">
+            <a:pPr marL="0" indent="0">
               <a:buNone/>
             </a:pPr>
             <a:r>
@@ -8047,7 +7911,7 @@
             <a:endParaRPr lang="en-US" sz="1300" dirty="0"/>
           </a:p>
           <a:p>
-            <a:pPr indent="0" marL="0">
+            <a:pPr marL="0" indent="0">
               <a:buNone/>
             </a:pPr>
             <a:r>
@@ -8064,7 +7928,7 @@
             <a:endParaRPr lang="en-US" sz="1300" dirty="0"/>
           </a:p>
           <a:p>
-            <a:pPr indent="0" marL="0">
+            <a:pPr marL="0" indent="0">
               <a:buNone/>
             </a:pPr>
             <a:r>
@@ -8081,13 +7945,13 @@
             <a:endParaRPr lang="en-US" sz="1300" dirty="0"/>
           </a:p>
           <a:p>
-            <a:pPr indent="0" marL="0">
+            <a:pPr marL="0" indent="0">
               <a:buNone/>
             </a:pPr>
             <a:endParaRPr lang="en-US" sz="1300" dirty="0"/>
           </a:p>
           <a:p>
-            <a:pPr indent="0" marL="0">
+            <a:pPr marL="0" indent="0">
               <a:buNone/>
             </a:pPr>
             <a:r>
@@ -8104,7 +7968,7 @@
             <a:endParaRPr lang="en-US" sz="1300" dirty="0"/>
           </a:p>
           <a:p>
-            <a:pPr indent="0" marL="0">
+            <a:pPr marL="0" indent="0">
               <a:buNone/>
             </a:pPr>
             <a:r>
@@ -8121,7 +7985,7 @@
             <a:endParaRPr lang="en-US" sz="1300" dirty="0"/>
           </a:p>
           <a:p>
-            <a:pPr indent="0" marL="0">
+            <a:pPr marL="0" indent="0">
               <a:buNone/>
             </a:pPr>
             <a:r>
@@ -8138,7 +8002,7 @@
             <a:endParaRPr lang="en-US" sz="1300" dirty="0"/>
           </a:p>
           <a:p>
-            <a:pPr indent="0" marL="0">
+            <a:pPr marL="0" indent="0">
               <a:buNone/>
             </a:pPr>
             <a:r>
@@ -8155,7 +8019,7 @@
             <a:endParaRPr lang="en-US" sz="1300" dirty="0"/>
           </a:p>
           <a:p>
-            <a:pPr indent="0" marL="0">
+            <a:pPr marL="0" indent="0">
               <a:buNone/>
             </a:pPr>
             <a:r>
@@ -8222,6 +8086,13 @@
             <a:prstDash val="solid"/>
           </a:ln>
         </p:spPr>
+        <p:txBody>
+          <a:bodyPr/>
+          <a:lstStyle/>
+          <a:p>
+            <a:endParaRPr lang="es-ES"/>
+          </a:p>
+        </p:txBody>
       </p:sp>
       <p:sp>
         <p:nvSpPr>
@@ -8244,7 +8115,7 @@
           <a:bodyPr wrap="square" rtlCol="0" anchor="ctr"/>
           <a:lstStyle/>
           <a:p>
-            <a:pPr indent="0" marL="0">
+            <a:pPr marL="0" indent="0">
               <a:buNone/>
             </a:pPr>
             <a:r>
@@ -8283,7 +8154,7 @@
           <a:bodyPr wrap="square" rtlCol="0" anchor="ctr"/>
           <a:lstStyle/>
           <a:p>
-            <a:pPr algn="r" indent="0" marL="0">
+            <a:pPr marL="0" indent="0" algn="r">
               <a:buNone/>
             </a:pPr>
             <a:r>
@@ -8325,6 +8196,13 @@
             <a:prstDash val="solid"/>
           </a:ln>
         </p:spPr>
+        <p:txBody>
+          <a:bodyPr/>
+          <a:lstStyle/>
+          <a:p>
+            <a:endParaRPr lang="es-ES"/>
+          </a:p>
+        </p:txBody>
       </p:sp>
       <p:sp>
         <p:nvSpPr>
@@ -8347,7 +8225,7 @@
           <a:bodyPr wrap="square" rtlCol="0" anchor="t"/>
           <a:lstStyle/>
           <a:p>
-            <a:pPr indent="0" marL="0">
+            <a:pPr marL="0" indent="0">
               <a:buNone/>
             </a:pPr>
             <a:r>
@@ -8365,7 +8243,7 @@
             <a:endParaRPr lang="en-US" sz="1900" dirty="0"/>
           </a:p>
           <a:p>
-            <a:pPr indent="0" marL="0">
+            <a:pPr marL="0" indent="0">
               <a:buNone/>
             </a:pPr>
             <a:r>
@@ -8404,7 +8282,7 @@
           <a:bodyPr wrap="square" rtlCol="0" anchor="t"/>
           <a:lstStyle/>
           <a:p>
-            <a:pPr indent="0" marL="0">
+            <a:pPr marL="0" indent="0">
               <a:buNone/>
             </a:pPr>
             <a:r>
@@ -8471,6 +8349,13 @@
             <a:prstDash val="solid"/>
           </a:ln>
         </p:spPr>
+        <p:txBody>
+          <a:bodyPr/>
+          <a:lstStyle/>
+          <a:p>
+            <a:endParaRPr lang="es-ES"/>
+          </a:p>
+        </p:txBody>
       </p:sp>
       <p:sp>
         <p:nvSpPr>
@@ -8493,7 +8378,7 @@
           <a:bodyPr wrap="square" rtlCol="0" anchor="ctr"/>
           <a:lstStyle/>
           <a:p>
-            <a:pPr indent="0" marL="0">
+            <a:pPr marL="0" indent="0">
               <a:buNone/>
             </a:pPr>
             <a:r>
@@ -8532,7 +8417,7 @@
           <a:bodyPr wrap="square" rtlCol="0" anchor="ctr"/>
           <a:lstStyle/>
           <a:p>
-            <a:pPr algn="r" indent="0" marL="0">
+            <a:pPr marL="0" indent="0" algn="r">
               <a:buNone/>
             </a:pPr>
             <a:r>
@@ -8571,7 +8456,7 @@
           <a:bodyPr wrap="square" rtlCol="0" anchor="t"/>
           <a:lstStyle/>
           <a:p>
-            <a:pPr indent="0" marL="0">
+            <a:pPr marL="0" indent="0">
               <a:buNone/>
             </a:pPr>
             <a:r>
@@ -8613,6 +8498,13 @@
             <a:prstDash val="solid"/>
           </a:ln>
         </p:spPr>
+        <p:txBody>
+          <a:bodyPr/>
+          <a:lstStyle/>
+          <a:p>
+            <a:endParaRPr lang="es-ES"/>
+          </a:p>
+        </p:txBody>
       </p:sp>
       <p:sp>
         <p:nvSpPr>
@@ -8635,7 +8527,7 @@
           <a:bodyPr wrap="square" rtlCol="0" anchor="ctr"/>
           <a:lstStyle/>
           <a:p>
-            <a:pPr indent="0" marL="0">
+            <a:pPr marL="0" indent="0">
               <a:buNone/>
             </a:pPr>
             <a:r>
@@ -8702,6 +8594,13 @@
             <a:prstDash val="solid"/>
           </a:ln>
         </p:spPr>
+        <p:txBody>
+          <a:bodyPr/>
+          <a:lstStyle/>
+          <a:p>
+            <a:endParaRPr lang="es-ES"/>
+          </a:p>
+        </p:txBody>
       </p:sp>
       <p:sp>
         <p:nvSpPr>
@@ -8724,7 +8623,7 @@
           <a:bodyPr wrap="square" rtlCol="0" anchor="ctr"/>
           <a:lstStyle/>
           <a:p>
-            <a:pPr indent="0" marL="0">
+            <a:pPr marL="0" indent="0">
               <a:buNone/>
             </a:pPr>
             <a:r>
@@ -8763,7 +8662,7 @@
           <a:bodyPr wrap="square" rtlCol="0" anchor="ctr"/>
           <a:lstStyle/>
           <a:p>
-            <a:pPr algn="r" indent="0" marL="0">
+            <a:pPr marL="0" indent="0" algn="r">
               <a:buNone/>
             </a:pPr>
             <a:r>
@@ -8802,7 +8701,7 @@
           <a:bodyPr wrap="square" rtlCol="0" anchor="t"/>
           <a:lstStyle/>
           <a:p>
-            <a:pPr indent="0" marL="0">
+            <a:pPr marL="0" indent="0">
               <a:buNone/>
             </a:pPr>
             <a:r>
@@ -8822,14 +8721,14 @@
       </p:sp>
       <p:pic>
         <p:nvPicPr>
-          <p:cNvPr id="6" name="Image 0" descr="C:/Users/Aitor/docxgen/img/psp-t2-jwt-authmanager-branch.png">    </p:cNvPr>
+          <p:cNvPr id="6" name="Image 0" descr="C:/Users/Aitor/docxgen/img/psp-t2-jwt-authmanager-branch.png"/>
           <p:cNvPicPr>
             <a:picLocks noChangeAspect="1"/>
           </p:cNvPicPr>
           <p:nvPr/>
         </p:nvPicPr>
         <p:blipFill>
-          <a:blip r:embed="rId1"/>
+          <a:blip r:embed="rId3"/>
           <a:stretch>
             <a:fillRect/>
           </a:stretch>
@@ -8893,6 +8792,13 @@
             <a:prstDash val="solid"/>
           </a:ln>
         </p:spPr>
+        <p:txBody>
+          <a:bodyPr/>
+          <a:lstStyle/>
+          <a:p>
+            <a:endParaRPr lang="es-ES"/>
+          </a:p>
+        </p:txBody>
       </p:sp>
       <p:sp>
         <p:nvSpPr>
@@ -8915,7 +8821,7 @@
           <a:bodyPr wrap="square" rtlCol="0" anchor="ctr"/>
           <a:lstStyle/>
           <a:p>
-            <a:pPr indent="0" marL="0">
+            <a:pPr marL="0" indent="0">
               <a:buNone/>
             </a:pPr>
             <a:r>
@@ -8954,7 +8860,7 @@
           <a:bodyPr wrap="square" rtlCol="0" anchor="ctr"/>
           <a:lstStyle/>
           <a:p>
-            <a:pPr algn="r" indent="0" marL="0">
+            <a:pPr marL="0" indent="0" algn="r">
               <a:buNone/>
             </a:pPr>
             <a:r>
@@ -8993,7 +8899,7 @@
           <a:bodyPr wrap="square" rtlCol="0" anchor="t"/>
           <a:lstStyle/>
           <a:p>
-            <a:pPr indent="0" marL="0">
+            <a:pPr marL="0" indent="0">
               <a:buNone/>
             </a:pPr>
             <a:r>
@@ -9035,6 +8941,13 @@
             <a:prstDash val="solid"/>
           </a:ln>
         </p:spPr>
+        <p:txBody>
+          <a:bodyPr/>
+          <a:lstStyle/>
+          <a:p>
+            <a:endParaRPr lang="es-ES"/>
+          </a:p>
+        </p:txBody>
       </p:sp>
       <p:sp>
         <p:nvSpPr>
@@ -9060,6 +8973,13 @@
             <a:prstDash val="solid"/>
           </a:ln>
         </p:spPr>
+        <p:txBody>
+          <a:bodyPr/>
+          <a:lstStyle/>
+          <a:p>
+            <a:endParaRPr lang="es-ES"/>
+          </a:p>
+        </p:txBody>
       </p:sp>
       <p:sp>
         <p:nvSpPr>
@@ -9082,7 +9002,7 @@
           <a:bodyPr wrap="square" rtlCol="0" anchor="t"/>
           <a:lstStyle/>
           <a:p>
-            <a:pPr indent="0" marL="0">
+            <a:pPr marL="0" indent="0">
               <a:buNone/>
             </a:pPr>
             <a:r>
@@ -9099,7 +9019,7 @@
             <a:endParaRPr lang="en-US" sz="1450" dirty="0"/>
           </a:p>
           <a:p>
-            <a:pPr indent="0" marL="0">
+            <a:pPr marL="0" indent="0">
               <a:buNone/>
             </a:pPr>
             <a:r>
@@ -9116,7 +9036,7 @@
             <a:endParaRPr lang="en-US" sz="1450" dirty="0"/>
           </a:p>
           <a:p>
-            <a:pPr indent="0" marL="0">
+            <a:pPr marL="0" indent="0">
               <a:buNone/>
             </a:pPr>
             <a:r>
@@ -9133,7 +9053,7 @@
             <a:endParaRPr lang="en-US" sz="1450" dirty="0"/>
           </a:p>
           <a:p>
-            <a:pPr indent="0" marL="0">
+            <a:pPr marL="0" indent="0">
               <a:buNone/>
             </a:pPr>
             <a:r>
@@ -9150,7 +9070,7 @@
             <a:endParaRPr lang="en-US" sz="1450" dirty="0"/>
           </a:p>
           <a:p>
-            <a:pPr indent="0" marL="0">
+            <a:pPr marL="0" indent="0">
               <a:buNone/>
             </a:pPr>
             <a:r>
@@ -9217,6 +9137,13 @@
             <a:prstDash val="solid"/>
           </a:ln>
         </p:spPr>
+        <p:txBody>
+          <a:bodyPr/>
+          <a:lstStyle/>
+          <a:p>
+            <a:endParaRPr lang="es-ES"/>
+          </a:p>
+        </p:txBody>
       </p:sp>
       <p:sp>
         <p:nvSpPr>
@@ -9239,7 +9166,7 @@
           <a:bodyPr wrap="square" rtlCol="0" anchor="ctr"/>
           <a:lstStyle/>
           <a:p>
-            <a:pPr indent="0" marL="0">
+            <a:pPr marL="0" indent="0">
               <a:buNone/>
             </a:pPr>
             <a:r>
@@ -9278,7 +9205,7 @@
           <a:bodyPr wrap="square" rtlCol="0" anchor="ctr"/>
           <a:lstStyle/>
           <a:p>
-            <a:pPr algn="r" indent="0" marL="0">
+            <a:pPr marL="0" indent="0" algn="r">
               <a:buNone/>
             </a:pPr>
             <a:r>
@@ -9304,8 +9231,8 @@
         </p:nvSpPr>
         <p:spPr>
           <a:xfrm>
-            <a:off x="548640" y="1188720"/>
-            <a:ext cx="11091672" cy="4206240"/>
+            <a:off x="548640" y="1188719"/>
+            <a:ext cx="11091672" cy="4644921"/>
           </a:xfrm>
           <a:prstGeom prst="rect">
             <a:avLst/>
@@ -9320,6 +9247,13 @@
             <a:prstDash val="solid"/>
           </a:ln>
         </p:spPr>
+        <p:txBody>
+          <a:bodyPr/>
+          <a:lstStyle/>
+          <a:p>
+            <a:endParaRPr lang="es-ES"/>
+          </a:p>
+        </p:txBody>
       </p:sp>
       <p:sp>
         <p:nvSpPr>
@@ -9330,7 +9264,7 @@
         <p:spPr>
           <a:xfrm>
             <a:off x="548640" y="1188720"/>
-            <a:ext cx="73152" cy="4206240"/>
+            <a:ext cx="73152" cy="4644920"/>
           </a:xfrm>
           <a:prstGeom prst="rect">
             <a:avLst/>
@@ -9345,6 +9279,13 @@
             <a:prstDash val="solid"/>
           </a:ln>
         </p:spPr>
+        <p:txBody>
+          <a:bodyPr/>
+          <a:lstStyle/>
+          <a:p>
+            <a:endParaRPr lang="es-ES"/>
+          </a:p>
+        </p:txBody>
       </p:sp>
       <p:sp>
         <p:nvSpPr>
@@ -9367,7 +9308,7 @@
           <a:bodyPr wrap="square" rtlCol="0" anchor="t"/>
           <a:lstStyle/>
           <a:p>
-            <a:pPr indent="0" marL="0">
+            <a:pPr marL="0" indent="0">
               <a:buNone/>
             </a:pPr>
             <a:r>
@@ -9384,7 +9325,7 @@
             <a:endParaRPr lang="en-US" sz="1050" dirty="0"/>
           </a:p>
           <a:p>
-            <a:pPr indent="0" marL="0">
+            <a:pPr marL="0" indent="0">
               <a:buNone/>
             </a:pPr>
             <a:r>
@@ -9401,7 +9342,7 @@
             <a:endParaRPr lang="en-US" sz="1050" dirty="0"/>
           </a:p>
           <a:p>
-            <a:pPr indent="0" marL="0">
+            <a:pPr marL="0" indent="0">
               <a:buNone/>
             </a:pPr>
             <a:r>
@@ -9418,13 +9359,13 @@
             <a:endParaRPr lang="en-US" sz="1050" dirty="0"/>
           </a:p>
           <a:p>
-            <a:pPr indent="0" marL="0">
+            <a:pPr marL="0" indent="0">
               <a:buNone/>
             </a:pPr>
             <a:endParaRPr lang="en-US" sz="1050" dirty="0"/>
           </a:p>
           <a:p>
-            <a:pPr indent="0" marL="0">
+            <a:pPr marL="0" indent="0">
               <a:buNone/>
             </a:pPr>
             <a:r>
@@ -9441,13 +9382,13 @@
             <a:endParaRPr lang="en-US" sz="1050" dirty="0"/>
           </a:p>
           <a:p>
-            <a:pPr indent="0" marL="0">
+            <a:pPr marL="0" indent="0">
               <a:buNone/>
             </a:pPr>
             <a:endParaRPr lang="en-US" sz="1050" dirty="0"/>
           </a:p>
           <a:p>
-            <a:pPr indent="0" marL="0">
+            <a:pPr marL="0" indent="0">
               <a:buNone/>
             </a:pPr>
             <a:r>
@@ -9464,7 +9405,7 @@
             <a:endParaRPr lang="en-US" sz="1050" dirty="0"/>
           </a:p>
           <a:p>
-            <a:pPr indent="0" marL="0">
+            <a:pPr marL="0" indent="0">
               <a:buNone/>
             </a:pPr>
             <a:r>
@@ -9481,13 +9422,13 @@
             <a:endParaRPr lang="en-US" sz="1050" dirty="0"/>
           </a:p>
           <a:p>
-            <a:pPr indent="0" marL="0">
+            <a:pPr marL="0" indent="0">
               <a:buNone/>
             </a:pPr>
             <a:endParaRPr lang="en-US" sz="1050" dirty="0"/>
           </a:p>
           <a:p>
-            <a:pPr indent="0" marL="0">
+            <a:pPr marL="0" indent="0">
               <a:buNone/>
             </a:pPr>
             <a:r>
@@ -9504,7 +9445,7 @@
             <a:endParaRPr lang="en-US" sz="1050" dirty="0"/>
           </a:p>
           <a:p>
-            <a:pPr indent="0" marL="0">
+            <a:pPr marL="0" indent="0">
               <a:buNone/>
             </a:pPr>
             <a:r>
@@ -9521,7 +9462,7 @@
             <a:endParaRPr lang="en-US" sz="1050" dirty="0"/>
           </a:p>
           <a:p>
-            <a:pPr indent="0" marL="0">
+            <a:pPr marL="0" indent="0">
               <a:buNone/>
             </a:pPr>
             <a:r>
@@ -9538,7 +9479,7 @@
             <a:endParaRPr lang="en-US" sz="1050" dirty="0"/>
           </a:p>
           <a:p>
-            <a:pPr indent="0" marL="0">
+            <a:pPr marL="0" indent="0">
               <a:buNone/>
             </a:pPr>
             <a:r>
@@ -9555,7 +9496,7 @@
             <a:endParaRPr lang="en-US" sz="1050" dirty="0"/>
           </a:p>
           <a:p>
-            <a:pPr indent="0" marL="0">
+            <a:pPr marL="0" indent="0">
               <a:buNone/>
             </a:pPr>
             <a:r>
@@ -9572,7 +9513,7 @@
             <a:endParaRPr lang="en-US" sz="1050" dirty="0"/>
           </a:p>
           <a:p>
-            <a:pPr indent="0" marL="0">
+            <a:pPr marL="0" indent="0">
               <a:buNone/>
             </a:pPr>
             <a:r>
@@ -9589,7 +9530,7 @@
             <a:endParaRPr lang="en-US" sz="1050" dirty="0"/>
           </a:p>
           <a:p>
-            <a:pPr indent="0" marL="0">
+            <a:pPr marL="0" indent="0">
               <a:buNone/>
             </a:pPr>
             <a:r>
@@ -9606,13 +9547,13 @@
             <a:endParaRPr lang="en-US" sz="1050" dirty="0"/>
           </a:p>
           <a:p>
-            <a:pPr indent="0" marL="0">
+            <a:pPr marL="0" indent="0">
               <a:buNone/>
             </a:pPr>
             <a:endParaRPr lang="en-US" sz="1050" dirty="0"/>
           </a:p>
           <a:p>
-            <a:pPr indent="0" marL="0">
+            <a:pPr marL="0" indent="0">
               <a:buNone/>
             </a:pPr>
             <a:r>
@@ -9629,7 +9570,7 @@
             <a:endParaRPr lang="en-US" sz="1050" dirty="0"/>
           </a:p>
           <a:p>
-            <a:pPr indent="0" marL="0">
+            <a:pPr marL="0" indent="0">
               <a:buNone/>
             </a:pPr>
             <a:r>
@@ -9646,7 +9587,7 @@
             <a:endParaRPr lang="en-US" sz="1050" dirty="0"/>
           </a:p>
           <a:p>
-            <a:pPr indent="0" marL="0">
+            <a:pPr marL="0" indent="0">
               <a:buNone/>
             </a:pPr>
             <a:r>
@@ -9663,7 +9604,7 @@
             <a:endParaRPr lang="en-US" sz="1050" dirty="0"/>
           </a:p>
           <a:p>
-            <a:pPr indent="0" marL="0">
+            <a:pPr marL="0" indent="0">
               <a:buNone/>
             </a:pPr>
             <a:r>
@@ -9680,13 +9621,13 @@
             <a:endParaRPr lang="en-US" sz="1050" dirty="0"/>
           </a:p>
           <a:p>
-            <a:pPr indent="0" marL="0">
+            <a:pPr marL="0" indent="0">
               <a:buNone/>
             </a:pPr>
             <a:endParaRPr lang="en-US" sz="1050" dirty="0"/>
           </a:p>
           <a:p>
-            <a:pPr indent="0" marL="0">
+            <a:pPr marL="0" indent="0">
               <a:buNone/>
             </a:pPr>
             <a:r>
@@ -9703,7 +9644,7 @@
             <a:endParaRPr lang="en-US" sz="1050" dirty="0"/>
           </a:p>
           <a:p>
-            <a:pPr indent="0" marL="0">
+            <a:pPr marL="0" indent="0">
               <a:buNone/>
             </a:pPr>
             <a:r>
@@ -9720,7 +9661,7 @@
             <a:endParaRPr lang="en-US" sz="1050" dirty="0"/>
           </a:p>
           <a:p>
-            <a:pPr indent="0" marL="0">
+            <a:pPr marL="0" indent="0">
               <a:buNone/>
             </a:pPr>
             <a:r>
@@ -9737,7 +9678,7 @@
             <a:endParaRPr lang="en-US" sz="1050" dirty="0"/>
           </a:p>
           <a:p>
-            <a:pPr indent="0" marL="0">
+            <a:pPr marL="0" indent="0">
               <a:buNone/>
             </a:pPr>
             <a:r>
@@ -9804,6 +9745,13 @@
             <a:prstDash val="solid"/>
           </a:ln>
         </p:spPr>
+        <p:txBody>
+          <a:bodyPr/>
+          <a:lstStyle/>
+          <a:p>
+            <a:endParaRPr lang="es-ES"/>
+          </a:p>
+        </p:txBody>
       </p:sp>
       <p:sp>
         <p:nvSpPr>
@@ -9826,7 +9774,7 @@
           <a:bodyPr wrap="square" rtlCol="0" anchor="ctr"/>
           <a:lstStyle/>
           <a:p>
-            <a:pPr indent="0" marL="0">
+            <a:pPr marL="0" indent="0">
               <a:buNone/>
             </a:pPr>
             <a:r>
@@ -9865,7 +9813,7 @@
           <a:bodyPr wrap="square" rtlCol="0" anchor="ctr"/>
           <a:lstStyle/>
           <a:p>
-            <a:pPr algn="r" indent="0" marL="0">
+            <a:pPr marL="0" indent="0" algn="r">
               <a:buNone/>
             </a:pPr>
             <a:r>
@@ -9907,6 +9855,13 @@
             <a:prstDash val="solid"/>
           </a:ln>
         </p:spPr>
+        <p:txBody>
+          <a:bodyPr/>
+          <a:lstStyle/>
+          <a:p>
+            <a:endParaRPr lang="es-ES"/>
+          </a:p>
+        </p:txBody>
       </p:sp>
       <p:sp>
         <p:nvSpPr>
@@ -9929,7 +9884,7 @@
           <a:bodyPr wrap="square" rtlCol="0" anchor="ctr"/>
           <a:lstStyle/>
           <a:p>
-            <a:pPr indent="0" marL="0">
+            <a:pPr marL="0" indent="0">
               <a:buNone/>
             </a:pPr>
             <a:r>
@@ -9968,7 +9923,7 @@
           <a:bodyPr wrap="square" rtlCol="0" anchor="t"/>
           <a:lstStyle/>
           <a:p>
-            <a:pPr indent="0" marL="0">
+            <a:pPr marL="0" indent="0">
               <a:buNone/>
             </a:pPr>
             <a:r>
@@ -10035,6 +9990,13 @@
             <a:prstDash val="solid"/>
           </a:ln>
         </p:spPr>
+        <p:txBody>
+          <a:bodyPr/>
+          <a:lstStyle/>
+          <a:p>
+            <a:endParaRPr lang="es-ES"/>
+          </a:p>
+        </p:txBody>
       </p:sp>
       <p:sp>
         <p:nvSpPr>
@@ -10057,7 +10019,7 @@
           <a:bodyPr wrap="square" rtlCol="0" anchor="ctr"/>
           <a:lstStyle/>
           <a:p>
-            <a:pPr indent="0" marL="0">
+            <a:pPr marL="0" indent="0">
               <a:buNone/>
             </a:pPr>
             <a:r>
@@ -10096,7 +10058,7 @@
           <a:bodyPr wrap="square" rtlCol="0" anchor="ctr"/>
           <a:lstStyle/>
           <a:p>
-            <a:pPr algn="r" indent="0" marL="0">
+            <a:pPr marL="0" indent="0" algn="r">
               <a:buNone/>
             </a:pPr>
             <a:r>
@@ -10138,6 +10100,13 @@
             <a:prstDash val="solid"/>
           </a:ln>
         </p:spPr>
+        <p:txBody>
+          <a:bodyPr/>
+          <a:lstStyle/>
+          <a:p>
+            <a:endParaRPr lang="es-ES"/>
+          </a:p>
+        </p:txBody>
       </p:sp>
       <p:sp>
         <p:nvSpPr>
@@ -10163,6 +10132,13 @@
             <a:prstDash val="solid"/>
           </a:ln>
         </p:spPr>
+        <p:txBody>
+          <a:bodyPr/>
+          <a:lstStyle/>
+          <a:p>
+            <a:endParaRPr lang="es-ES"/>
+          </a:p>
+        </p:txBody>
       </p:sp>
       <p:sp>
         <p:nvSpPr>
@@ -10185,7 +10161,7 @@
           <a:bodyPr wrap="square" rtlCol="0" anchor="t"/>
           <a:lstStyle/>
           <a:p>
-            <a:pPr indent="0" marL="0">
+            <a:pPr marL="0" indent="0">
               <a:buNone/>
             </a:pPr>
             <a:r>
@@ -10202,7 +10178,7 @@
             <a:endParaRPr lang="en-US" sz="1400" dirty="0"/>
           </a:p>
           <a:p>
-            <a:pPr indent="0" marL="0">
+            <a:pPr marL="0" indent="0">
               <a:buNone/>
             </a:pPr>
             <a:r>
@@ -10219,7 +10195,7 @@
             <a:endParaRPr lang="en-US" sz="1400" dirty="0"/>
           </a:p>
           <a:p>
-            <a:pPr indent="0" marL="0">
+            <a:pPr marL="0" indent="0">
               <a:buNone/>
             </a:pPr>
             <a:r>
@@ -10236,7 +10212,7 @@
             <a:endParaRPr lang="en-US" sz="1400" dirty="0"/>
           </a:p>
           <a:p>
-            <a:pPr indent="0" marL="0">
+            <a:pPr marL="0" indent="0">
               <a:buNone/>
             </a:pPr>
             <a:r>
@@ -10253,13 +10229,13 @@
             <a:endParaRPr lang="en-US" sz="1400" dirty="0"/>
           </a:p>
           <a:p>
-            <a:pPr indent="0" marL="0">
+            <a:pPr marL="0" indent="0">
               <a:buNone/>
             </a:pPr>
             <a:endParaRPr lang="en-US" sz="1400" dirty="0"/>
           </a:p>
           <a:p>
-            <a:pPr indent="0" marL="0">
+            <a:pPr marL="0" indent="0">
               <a:buNone/>
             </a:pPr>
             <a:r>
@@ -10298,7 +10274,7 @@
           <a:bodyPr wrap="square" rtlCol="0" anchor="t"/>
           <a:lstStyle/>
           <a:p>
-            <a:pPr indent="0" marL="0">
+            <a:pPr marL="0" indent="0">
               <a:buNone/>
             </a:pPr>
             <a:r>
@@ -10365,6 +10341,13 @@
             <a:prstDash val="solid"/>
           </a:ln>
         </p:spPr>
+        <p:txBody>
+          <a:bodyPr/>
+          <a:lstStyle/>
+          <a:p>
+            <a:endParaRPr lang="es-ES"/>
+          </a:p>
+        </p:txBody>
       </p:sp>
       <p:sp>
         <p:nvSpPr>
@@ -10387,7 +10370,7 @@
           <a:bodyPr wrap="square" rtlCol="0" anchor="ctr"/>
           <a:lstStyle/>
           <a:p>
-            <a:pPr indent="0" marL="0">
+            <a:pPr marL="0" indent="0">
               <a:buNone/>
             </a:pPr>
             <a:r>
@@ -10426,7 +10409,7 @@
           <a:bodyPr wrap="square" rtlCol="0" anchor="ctr"/>
           <a:lstStyle/>
           <a:p>
-            <a:pPr algn="r" indent="0" marL="0">
+            <a:pPr marL="0" indent="0" algn="r">
               <a:buNone/>
             </a:pPr>
             <a:r>
@@ -10468,6 +10451,13 @@
             <a:prstDash val="solid"/>
           </a:ln>
         </p:spPr>
+        <p:txBody>
+          <a:bodyPr/>
+          <a:lstStyle/>
+          <a:p>
+            <a:endParaRPr lang="es-ES"/>
+          </a:p>
+        </p:txBody>
       </p:sp>
       <p:sp>
         <p:nvSpPr>
@@ -10493,6 +10483,13 @@
             <a:prstDash val="solid"/>
           </a:ln>
         </p:spPr>
+        <p:txBody>
+          <a:bodyPr/>
+          <a:lstStyle/>
+          <a:p>
+            <a:endParaRPr lang="es-ES"/>
+          </a:p>
+        </p:txBody>
       </p:sp>
       <p:sp>
         <p:nvSpPr>
@@ -10515,7 +10512,7 @@
           <a:bodyPr wrap="square" rtlCol="0" anchor="t"/>
           <a:lstStyle/>
           <a:p>
-            <a:pPr indent="0" marL="0">
+            <a:pPr marL="0" indent="0">
               <a:buNone/>
             </a:pPr>
             <a:r>
@@ -10532,7 +10529,7 @@
             <a:endParaRPr lang="en-US" sz="1350" dirty="0"/>
           </a:p>
           <a:p>
-            <a:pPr indent="0" marL="0">
+            <a:pPr marL="0" indent="0">
               <a:buNone/>
             </a:pPr>
             <a:r>
@@ -10549,7 +10546,7 @@
             <a:endParaRPr lang="en-US" sz="1350" dirty="0"/>
           </a:p>
           <a:p>
-            <a:pPr indent="0" marL="0">
+            <a:pPr marL="0" indent="0">
               <a:buNone/>
             </a:pPr>
             <a:r>
@@ -10566,7 +10563,7 @@
             <a:endParaRPr lang="en-US" sz="1350" dirty="0"/>
           </a:p>
           <a:p>
-            <a:pPr indent="0" marL="0">
+            <a:pPr marL="0" indent="0">
               <a:buNone/>
             </a:pPr>
             <a:r>
@@ -10583,7 +10580,7 @@
             <a:endParaRPr lang="en-US" sz="1350" dirty="0"/>
           </a:p>
           <a:p>
-            <a:pPr indent="0" marL="0">
+            <a:pPr marL="0" indent="0">
               <a:buNone/>
             </a:pPr>
             <a:r>
@@ -10600,7 +10597,7 @@
             <a:endParaRPr lang="en-US" sz="1350" dirty="0"/>
           </a:p>
           <a:p>
-            <a:pPr indent="0" marL="0">
+            <a:pPr marL="0" indent="0">
               <a:buNone/>
             </a:pPr>
             <a:r>
@@ -10617,7 +10614,7 @@
             <a:endParaRPr lang="en-US" sz="1350" dirty="0"/>
           </a:p>
           <a:p>
-            <a:pPr indent="0" marL="0">
+            <a:pPr marL="0" indent="0">
               <a:buNone/>
             </a:pPr>
             <a:r>
@@ -10634,7 +10631,7 @@
             <a:endParaRPr lang="en-US" sz="1350" dirty="0"/>
           </a:p>
           <a:p>
-            <a:pPr indent="0" marL="0">
+            <a:pPr marL="0" indent="0">
               <a:buNone/>
             </a:pPr>
             <a:r>
@@ -10673,7 +10670,7 @@
           <a:bodyPr wrap="square" rtlCol="0" anchor="t"/>
           <a:lstStyle/>
           <a:p>
-            <a:pPr indent="0" marL="0">
+            <a:pPr marL="0" indent="0">
               <a:buNone/>
             </a:pPr>
             <a:r>
@@ -10740,6 +10737,13 @@
             <a:prstDash val="solid"/>
           </a:ln>
         </p:spPr>
+        <p:txBody>
+          <a:bodyPr/>
+          <a:lstStyle/>
+          <a:p>
+            <a:endParaRPr lang="es-ES"/>
+          </a:p>
+        </p:txBody>
       </p:sp>
       <p:sp>
         <p:nvSpPr>
@@ -10762,7 +10766,7 @@
           <a:bodyPr wrap="square" rtlCol="0" anchor="ctr"/>
           <a:lstStyle/>
           <a:p>
-            <a:pPr indent="0" marL="0">
+            <a:pPr marL="0" indent="0">
               <a:buNone/>
             </a:pPr>
             <a:r>
@@ -10801,7 +10805,7 @@
           <a:bodyPr wrap="square" rtlCol="0" anchor="ctr"/>
           <a:lstStyle/>
           <a:p>
-            <a:pPr algn="r" indent="0" marL="0">
+            <a:pPr marL="0" indent="0" algn="r">
               <a:buNone/>
             </a:pPr>
             <a:r>
@@ -10843,6 +10847,13 @@
             <a:prstDash val="solid"/>
           </a:ln>
         </p:spPr>
+        <p:txBody>
+          <a:bodyPr/>
+          <a:lstStyle/>
+          <a:p>
+            <a:endParaRPr lang="es-ES"/>
+          </a:p>
+        </p:txBody>
       </p:sp>
       <p:sp>
         <p:nvSpPr>
@@ -10865,7 +10876,7 @@
           <a:bodyPr wrap="square" rtlCol="0" anchor="ctr"/>
           <a:lstStyle/>
           <a:p>
-            <a:pPr indent="0" marL="0">
+            <a:pPr marL="0" indent="0">
               <a:buNone/>
             </a:pPr>
             <a:r>
@@ -10932,6 +10943,13 @@
             <a:prstDash val="solid"/>
           </a:ln>
         </p:spPr>
+        <p:txBody>
+          <a:bodyPr/>
+          <a:lstStyle/>
+          <a:p>
+            <a:endParaRPr lang="es-ES"/>
+          </a:p>
+        </p:txBody>
       </p:sp>
       <p:sp>
         <p:nvSpPr>
@@ -10954,7 +10972,7 @@
           <a:bodyPr wrap="square" rtlCol="0" anchor="ctr"/>
           <a:lstStyle/>
           <a:p>
-            <a:pPr indent="0" marL="0">
+            <a:pPr marL="0" indent="0">
               <a:buNone/>
             </a:pPr>
             <a:r>
@@ -10993,7 +11011,7 @@
           <a:bodyPr wrap="square" rtlCol="0" anchor="ctr"/>
           <a:lstStyle/>
           <a:p>
-            <a:pPr algn="r" indent="0" marL="0">
+            <a:pPr marL="0" indent="0" algn="r">
               <a:buNone/>
             </a:pPr>
             <a:r>
@@ -11035,6 +11053,13 @@
             <a:prstDash val="solid"/>
           </a:ln>
         </p:spPr>
+        <p:txBody>
+          <a:bodyPr/>
+          <a:lstStyle/>
+          <a:p>
+            <a:endParaRPr lang="es-ES"/>
+          </a:p>
+        </p:txBody>
       </p:sp>
       <p:sp>
         <p:nvSpPr>
@@ -11060,6 +11085,13 @@
             <a:prstDash val="solid"/>
           </a:ln>
         </p:spPr>
+        <p:txBody>
+          <a:bodyPr/>
+          <a:lstStyle/>
+          <a:p>
+            <a:endParaRPr lang="es-ES"/>
+          </a:p>
+        </p:txBody>
       </p:sp>
       <p:sp>
         <p:nvSpPr>
@@ -11082,7 +11114,7 @@
           <a:bodyPr wrap="square" rtlCol="0" anchor="t"/>
           <a:lstStyle/>
           <a:p>
-            <a:pPr indent="0" marL="0">
+            <a:pPr marL="0" indent="0">
               <a:buNone/>
             </a:pPr>
             <a:r>
@@ -11099,7 +11131,7 @@
             <a:endParaRPr lang="en-US" sz="1400" dirty="0"/>
           </a:p>
           <a:p>
-            <a:pPr indent="0" marL="0">
+            <a:pPr marL="0" indent="0">
               <a:buNone/>
             </a:pPr>
             <a:r>
@@ -11116,7 +11148,7 @@
             <a:endParaRPr lang="en-US" sz="1400" dirty="0"/>
           </a:p>
           <a:p>
-            <a:pPr indent="0" marL="0">
+            <a:pPr marL="0" indent="0">
               <a:buNone/>
             </a:pPr>
             <a:r>
@@ -11133,13 +11165,13 @@
             <a:endParaRPr lang="en-US" sz="1400" dirty="0"/>
           </a:p>
           <a:p>
-            <a:pPr indent="0" marL="0">
+            <a:pPr marL="0" indent="0">
               <a:buNone/>
             </a:pPr>
             <a:endParaRPr lang="en-US" sz="1400" dirty="0"/>
           </a:p>
           <a:p>
-            <a:pPr indent="0" marL="0">
+            <a:pPr marL="0" indent="0">
               <a:buNone/>
             </a:pPr>
             <a:r>
@@ -11156,7 +11188,7 @@
             <a:endParaRPr lang="en-US" sz="1400" dirty="0"/>
           </a:p>
           <a:p>
-            <a:pPr indent="0" marL="0">
+            <a:pPr marL="0" indent="0">
               <a:buNone/>
             </a:pPr>
             <a:r>
@@ -11173,7 +11205,7 @@
             <a:endParaRPr lang="en-US" sz="1400" dirty="0"/>
           </a:p>
           <a:p>
-            <a:pPr indent="0" marL="0">
+            <a:pPr marL="0" indent="0">
               <a:buNone/>
             </a:pPr>
             <a:r>
@@ -11190,7 +11222,7 @@
             <a:endParaRPr lang="en-US" sz="1400" dirty="0"/>
           </a:p>
           <a:p>
-            <a:pPr indent="0" marL="0">
+            <a:pPr marL="0" indent="0">
               <a:buNone/>
             </a:pPr>
             <a:r>
@@ -11207,7 +11239,7 @@
             <a:endParaRPr lang="en-US" sz="1400" dirty="0"/>
           </a:p>
           <a:p>
-            <a:pPr indent="0" marL="0">
+            <a:pPr marL="0" indent="0">
               <a:buNone/>
             </a:pPr>
             <a:r>
@@ -11246,7 +11278,7 @@
           <a:bodyPr wrap="square" rtlCol="0" anchor="t"/>
           <a:lstStyle/>
           <a:p>
-            <a:pPr indent="0" marL="0">
+            <a:pPr marL="0" indent="0">
               <a:buNone/>
             </a:pPr>
             <a:r>
@@ -11313,6 +11345,13 @@
             <a:prstDash val="solid"/>
           </a:ln>
         </p:spPr>
+        <p:txBody>
+          <a:bodyPr/>
+          <a:lstStyle/>
+          <a:p>
+            <a:endParaRPr lang="es-ES"/>
+          </a:p>
+        </p:txBody>
       </p:sp>
       <p:sp>
         <p:nvSpPr>
@@ -11335,7 +11374,7 @@
           <a:bodyPr wrap="square" rtlCol="0" anchor="ctr"/>
           <a:lstStyle/>
           <a:p>
-            <a:pPr indent="0" marL="0">
+            <a:pPr marL="0" indent="0">
               <a:buNone/>
             </a:pPr>
             <a:r>
@@ -11374,7 +11413,7 @@
           <a:bodyPr wrap="square" rtlCol="0" anchor="ctr"/>
           <a:lstStyle/>
           <a:p>
-            <a:pPr algn="r" indent="0" marL="0">
+            <a:pPr marL="0" indent="0" algn="r">
               <a:buNone/>
             </a:pPr>
             <a:r>
@@ -11408,16 +11447,34 @@
         </p:nvGraphicFramePr>
         <p:xfrm>
           <a:off x="548640" y="2103120"/>
-          <a:ext cx="11091672" cy="914400"/>
+          <a:ext cx="11091671" cy="3840480"/>
         </p:xfrm>
         <a:graphic>
           <a:graphicData uri="http://schemas.openxmlformats.org/drawingml/2006/table">
             <a:tbl>
               <a:tblPr/>
               <a:tblGrid>
-                <a:gridCol w="2662001"/>
-                <a:gridCol w="4214835"/>
-                <a:gridCol w="4214835"/>
+                <a:gridCol w="2662001">
+                  <a:extLst>
+                    <a:ext uri="{9D8B030D-6E8A-4147-A177-3AD203B41FA5}">
+                      <a16:colId xmlns:a16="http://schemas.microsoft.com/office/drawing/2014/main" val="20000"/>
+                    </a:ext>
+                  </a:extLst>
+                </a:gridCol>
+                <a:gridCol w="4214835">
+                  <a:extLst>
+                    <a:ext uri="{9D8B030D-6E8A-4147-A177-3AD203B41FA5}">
+                      <a16:colId xmlns:a16="http://schemas.microsoft.com/office/drawing/2014/main" val="20001"/>
+                    </a:ext>
+                  </a:extLst>
+                </a:gridCol>
+                <a:gridCol w="4214835">
+                  <a:extLst>
+                    <a:ext uri="{9D8B030D-6E8A-4147-A177-3AD203B41FA5}">
+                      <a16:colId xmlns:a16="http://schemas.microsoft.com/office/drawing/2014/main" val="20002"/>
+                    </a:ext>
+                  </a:extLst>
+                </a:gridCol>
               </a:tblGrid>
               <a:tr h="960120">
                 <a:tc>
@@ -11425,7 +11482,7 @@
                     <a:bodyPr/>
                     <a:lstStyle/>
                     <a:p>
-                      <a:pPr algn="ctr" indent="0" marL="0">
+                      <a:pPr marL="0" indent="0" algn="ctr">
                         <a:buNone/>
                       </a:pPr>
                       <a:endParaRPr lang="en-US" sz="1650" dirty="0">
@@ -11435,7 +11492,7 @@
                       </a:endParaRPr>
                     </a:p>
                   </a:txBody>
-                  <a:tcPr marL="91440" marR="91440" marT="45720" marB="45720" anchor="ctr">
+                  <a:tcPr anchor="ctr">
                     <a:lnL w="12700" cap="flat" cmpd="sng" algn="ctr">
                       <a:solidFill>
                         <a:srgbClr val="EEEEEE"/>
@@ -11482,7 +11539,7 @@
                     <a:bodyPr/>
                     <a:lstStyle/>
                     <a:p>
-                      <a:pPr algn="ctr" indent="0" marL="0">
+                      <a:pPr marL="0" indent="0" algn="ctr">
                         <a:buNone/>
                       </a:pPr>
                       <a:r>
@@ -11503,7 +11560,7 @@
                       </a:endParaRPr>
                     </a:p>
                   </a:txBody>
-                  <a:tcPr marL="91440" marR="91440" marT="45720" marB="45720" anchor="ctr">
+                  <a:tcPr anchor="ctr">
                     <a:lnL w="12700" cap="flat" cmpd="sng" algn="ctr">
                       <a:solidFill>
                         <a:srgbClr val="EEEEEE"/>
@@ -11550,7 +11607,7 @@
                     <a:bodyPr/>
                     <a:lstStyle/>
                     <a:p>
-                      <a:pPr algn="ctr" indent="0" marL="0">
+                      <a:pPr marL="0" indent="0" algn="ctr">
                         <a:buNone/>
                       </a:pPr>
                       <a:r>
@@ -11571,7 +11628,7 @@
                       </a:endParaRPr>
                     </a:p>
                   </a:txBody>
-                  <a:tcPr marL="91440" marR="91440" marT="45720" marB="45720" anchor="ctr">
+                  <a:tcPr anchor="ctr">
                     <a:lnL w="12700" cap="flat" cmpd="sng" algn="ctr">
                       <a:solidFill>
                         <a:srgbClr val="EEEEEE"/>
@@ -11613,6 +11670,11 @@
                     </a:solidFill>
                   </a:tcPr>
                 </a:tc>
+                <a:extLst>
+                  <a:ext uri="{0D108BD9-81ED-4DB2-BD59-A6C34878D82A}">
+                    <a16:rowId xmlns:a16="http://schemas.microsoft.com/office/drawing/2014/main" val="10000"/>
+                  </a:ext>
+                </a:extLst>
               </a:tr>
               <a:tr h="960120">
                 <a:tc>
@@ -11620,7 +11682,7 @@
                     <a:bodyPr/>
                     <a:lstStyle/>
                     <a:p>
-                      <a:pPr indent="0" marL="0">
+                      <a:pPr marL="0" indent="0">
                         <a:buNone/>
                       </a:pPr>
                       <a:r>
@@ -11641,7 +11703,7 @@
                       </a:endParaRPr>
                     </a:p>
                   </a:txBody>
-                  <a:tcPr marL="91440" marR="91440" marT="45720" marB="45720" anchor="ctr">
+                  <a:tcPr anchor="ctr">
                     <a:lnL w="12700" cap="flat" cmpd="sng" algn="ctr">
                       <a:solidFill>
                         <a:srgbClr val="EEEEEE"/>
@@ -11688,7 +11750,7 @@
                     <a:bodyPr/>
                     <a:lstStyle/>
                     <a:p>
-                      <a:pPr indent="0" marL="0">
+                      <a:pPr marL="0" indent="0">
                         <a:buNone/>
                       </a:pPr>
                       <a:r>
@@ -11709,7 +11771,7 @@
                       </a:endParaRPr>
                     </a:p>
                   </a:txBody>
-                  <a:tcPr marL="91440" marR="91440" marT="45720" marB="45720" anchor="ctr">
+                  <a:tcPr anchor="ctr">
                     <a:lnL w="12700" cap="flat" cmpd="sng" algn="ctr">
                       <a:solidFill>
                         <a:srgbClr val="EEEEEE"/>
@@ -11756,7 +11818,7 @@
                     <a:bodyPr/>
                     <a:lstStyle/>
                     <a:p>
-                      <a:pPr indent="0" marL="0">
+                      <a:pPr marL="0" indent="0">
                         <a:buNone/>
                       </a:pPr>
                       <a:r>
@@ -11777,7 +11839,7 @@
                       </a:endParaRPr>
                     </a:p>
                   </a:txBody>
-                  <a:tcPr marL="91440" marR="91440" marT="45720" marB="45720" anchor="ctr">
+                  <a:tcPr anchor="ctr">
                     <a:lnL w="12700" cap="flat" cmpd="sng" algn="ctr">
                       <a:solidFill>
                         <a:srgbClr val="EEEEEE"/>
@@ -11819,6 +11881,11 @@
                     </a:solidFill>
                   </a:tcPr>
                 </a:tc>
+                <a:extLst>
+                  <a:ext uri="{0D108BD9-81ED-4DB2-BD59-A6C34878D82A}">
+                    <a16:rowId xmlns:a16="http://schemas.microsoft.com/office/drawing/2014/main" val="10001"/>
+                  </a:ext>
+                </a:extLst>
               </a:tr>
               <a:tr h="960120">
                 <a:tc>
@@ -11826,7 +11893,7 @@
                     <a:bodyPr/>
                     <a:lstStyle/>
                     <a:p>
-                      <a:pPr indent="0" marL="0">
+                      <a:pPr marL="0" indent="0">
                         <a:buNone/>
                       </a:pPr>
                       <a:r>
@@ -11847,7 +11914,7 @@
                       </a:endParaRPr>
                     </a:p>
                   </a:txBody>
-                  <a:tcPr marL="91440" marR="91440" marT="45720" marB="45720" anchor="ctr">
+                  <a:tcPr anchor="ctr">
                     <a:lnL w="12700" cap="flat" cmpd="sng" algn="ctr">
                       <a:solidFill>
                         <a:srgbClr val="EEEEEE"/>
@@ -11894,7 +11961,7 @@
                     <a:bodyPr/>
                     <a:lstStyle/>
                     <a:p>
-                      <a:pPr indent="0" marL="0">
+                      <a:pPr marL="0" indent="0">
                         <a:buNone/>
                       </a:pPr>
                       <a:r>
@@ -11915,7 +11982,7 @@
                       </a:endParaRPr>
                     </a:p>
                   </a:txBody>
-                  <a:tcPr marL="91440" marR="91440" marT="45720" marB="45720" anchor="ctr">
+                  <a:tcPr anchor="ctr">
                     <a:lnL w="12700" cap="flat" cmpd="sng" algn="ctr">
                       <a:solidFill>
                         <a:srgbClr val="EEEEEE"/>
@@ -11962,7 +12029,7 @@
                     <a:bodyPr/>
                     <a:lstStyle/>
                     <a:p>
-                      <a:pPr indent="0" marL="0">
+                      <a:pPr marL="0" indent="0">
                         <a:buNone/>
                       </a:pPr>
                       <a:r>
@@ -11983,7 +12050,7 @@
                       </a:endParaRPr>
                     </a:p>
                   </a:txBody>
-                  <a:tcPr marL="91440" marR="91440" marT="45720" marB="45720" anchor="ctr">
+                  <a:tcPr anchor="ctr">
                     <a:lnL w="12700" cap="flat" cmpd="sng" algn="ctr">
                       <a:solidFill>
                         <a:srgbClr val="EEEEEE"/>
@@ -12025,6 +12092,11 @@
                     </a:solidFill>
                   </a:tcPr>
                 </a:tc>
+                <a:extLst>
+                  <a:ext uri="{0D108BD9-81ED-4DB2-BD59-A6C34878D82A}">
+                    <a16:rowId xmlns:a16="http://schemas.microsoft.com/office/drawing/2014/main" val="10002"/>
+                  </a:ext>
+                </a:extLst>
               </a:tr>
               <a:tr h="960120">
                 <a:tc>
@@ -12032,7 +12104,7 @@
                     <a:bodyPr/>
                     <a:lstStyle/>
                     <a:p>
-                      <a:pPr indent="0" marL="0">
+                      <a:pPr marL="0" indent="0">
                         <a:buNone/>
                       </a:pPr>
                       <a:r>
@@ -12053,7 +12125,7 @@
                       </a:endParaRPr>
                     </a:p>
                   </a:txBody>
-                  <a:tcPr marL="91440" marR="91440" marT="45720" marB="45720" anchor="ctr">
+                  <a:tcPr anchor="ctr">
                     <a:lnL w="12700" cap="flat" cmpd="sng" algn="ctr">
                       <a:solidFill>
                         <a:srgbClr val="EEEEEE"/>
@@ -12100,7 +12172,7 @@
                     <a:bodyPr/>
                     <a:lstStyle/>
                     <a:p>
-                      <a:pPr indent="0" marL="0">
+                      <a:pPr marL="0" indent="0">
                         <a:buNone/>
                       </a:pPr>
                       <a:r>
@@ -12121,7 +12193,7 @@
                       </a:endParaRPr>
                     </a:p>
                   </a:txBody>
-                  <a:tcPr marL="91440" marR="91440" marT="45720" marB="45720" anchor="ctr">
+                  <a:tcPr anchor="ctr">
                     <a:lnL w="12700" cap="flat" cmpd="sng" algn="ctr">
                       <a:solidFill>
                         <a:srgbClr val="EEEEEE"/>
@@ -12168,7 +12240,7 @@
                     <a:bodyPr/>
                     <a:lstStyle/>
                     <a:p>
-                      <a:pPr indent="0" marL="0">
+                      <a:pPr marL="0" indent="0">
                         <a:buNone/>
                       </a:pPr>
                       <a:r>
@@ -12189,7 +12261,7 @@
                       </a:endParaRPr>
                     </a:p>
                   </a:txBody>
-                  <a:tcPr marL="91440" marR="91440" marT="45720" marB="45720" anchor="ctr">
+                  <a:tcPr anchor="ctr">
                     <a:lnL w="12700" cap="flat" cmpd="sng" algn="ctr">
                       <a:solidFill>
                         <a:srgbClr val="EEEEEE"/>
@@ -12231,6 +12303,11 @@
                     </a:solidFill>
                   </a:tcPr>
                 </a:tc>
+                <a:extLst>
+                  <a:ext uri="{0D108BD9-81ED-4DB2-BD59-A6C34878D82A}">
+                    <a16:rowId xmlns:a16="http://schemas.microsoft.com/office/drawing/2014/main" val="10003"/>
+                  </a:ext>
+                </a:extLst>
               </a:tr>
             </a:tbl>
           </a:graphicData>
@@ -12285,6 +12362,13 @@
             <a:prstDash val="solid"/>
           </a:ln>
         </p:spPr>
+        <p:txBody>
+          <a:bodyPr/>
+          <a:lstStyle/>
+          <a:p>
+            <a:endParaRPr lang="es-ES"/>
+          </a:p>
+        </p:txBody>
       </p:sp>
       <p:sp>
         <p:nvSpPr>
@@ -12307,7 +12391,7 @@
           <a:bodyPr wrap="square" rtlCol="0" anchor="ctr"/>
           <a:lstStyle/>
           <a:p>
-            <a:pPr indent="0" marL="0">
+            <a:pPr marL="0" indent="0">
               <a:buNone/>
             </a:pPr>
             <a:r>
@@ -12346,7 +12430,7 @@
           <a:bodyPr wrap="square" rtlCol="0" anchor="ctr"/>
           <a:lstStyle/>
           <a:p>
-            <a:pPr algn="r" indent="0" marL="0">
+            <a:pPr marL="0" indent="0" algn="r">
               <a:buNone/>
             </a:pPr>
             <a:r>
@@ -12388,6 +12472,13 @@
             <a:prstDash val="solid"/>
           </a:ln>
         </p:spPr>
+        <p:txBody>
+          <a:bodyPr/>
+          <a:lstStyle/>
+          <a:p>
+            <a:endParaRPr lang="es-ES"/>
+          </a:p>
+        </p:txBody>
       </p:sp>
       <p:sp>
         <p:nvSpPr>
@@ -12413,6 +12504,13 @@
             <a:prstDash val="solid"/>
           </a:ln>
         </p:spPr>
+        <p:txBody>
+          <a:bodyPr/>
+          <a:lstStyle/>
+          <a:p>
+            <a:endParaRPr lang="es-ES"/>
+          </a:p>
+        </p:txBody>
       </p:sp>
       <p:sp>
         <p:nvSpPr>
@@ -12435,7 +12533,7 @@
           <a:bodyPr wrap="square" rtlCol="0" anchor="t"/>
           <a:lstStyle/>
           <a:p>
-            <a:pPr indent="0" marL="0">
+            <a:pPr marL="0" indent="0">
               <a:buNone/>
             </a:pPr>
             <a:r>
@@ -12452,7 +12550,7 @@
             <a:endParaRPr lang="en-US" sz="1100" dirty="0"/>
           </a:p>
           <a:p>
-            <a:pPr indent="0" marL="0">
+            <a:pPr marL="0" indent="0">
               <a:buNone/>
             </a:pPr>
             <a:r>
@@ -12469,7 +12567,7 @@
             <a:endParaRPr lang="en-US" sz="1100" dirty="0"/>
           </a:p>
           <a:p>
-            <a:pPr indent="0" marL="0">
+            <a:pPr marL="0" indent="0">
               <a:buNone/>
             </a:pPr>
             <a:r>
@@ -12486,7 +12584,7 @@
             <a:endParaRPr lang="en-US" sz="1100" dirty="0"/>
           </a:p>
           <a:p>
-            <a:pPr indent="0" marL="0">
+            <a:pPr marL="0" indent="0">
               <a:buNone/>
             </a:pPr>
             <a:r>
@@ -12503,7 +12601,7 @@
             <a:endParaRPr lang="en-US" sz="1100" dirty="0"/>
           </a:p>
           <a:p>
-            <a:pPr indent="0" marL="0">
+            <a:pPr marL="0" indent="0">
               <a:buNone/>
             </a:pPr>
             <a:r>
@@ -12520,7 +12618,7 @@
             <a:endParaRPr lang="en-US" sz="1100" dirty="0"/>
           </a:p>
           <a:p>
-            <a:pPr indent="0" marL="0">
+            <a:pPr marL="0" indent="0">
               <a:buNone/>
             </a:pPr>
             <a:r>
@@ -12537,7 +12635,7 @@
             <a:endParaRPr lang="en-US" sz="1100" dirty="0"/>
           </a:p>
           <a:p>
-            <a:pPr indent="0" marL="0">
+            <a:pPr marL="0" indent="0">
               <a:buNone/>
             </a:pPr>
             <a:r>
@@ -12554,7 +12652,7 @@
             <a:endParaRPr lang="en-US" sz="1100" dirty="0"/>
           </a:p>
           <a:p>
-            <a:pPr indent="0" marL="0">
+            <a:pPr marL="0" indent="0">
               <a:buNone/>
             </a:pPr>
             <a:r>
@@ -12571,7 +12669,7 @@
             <a:endParaRPr lang="en-US" sz="1100" dirty="0"/>
           </a:p>
           <a:p>
-            <a:pPr indent="0" marL="0">
+            <a:pPr marL="0" indent="0">
               <a:buNone/>
             </a:pPr>
             <a:r>
@@ -12588,7 +12686,7 @@
             <a:endParaRPr lang="en-US" sz="1100" dirty="0"/>
           </a:p>
           <a:p>
-            <a:pPr indent="0" marL="0">
+            <a:pPr marL="0" indent="0">
               <a:buNone/>
             </a:pPr>
             <a:r>
@@ -12605,7 +12703,7 @@
             <a:endParaRPr lang="en-US" sz="1100" dirty="0"/>
           </a:p>
           <a:p>
-            <a:pPr indent="0" marL="0">
+            <a:pPr marL="0" indent="0">
               <a:buNone/>
             </a:pPr>
             <a:r>
@@ -12622,7 +12720,7 @@
             <a:endParaRPr lang="en-US" sz="1100" dirty="0"/>
           </a:p>
           <a:p>
-            <a:pPr indent="0" marL="0">
+            <a:pPr marL="0" indent="0">
               <a:buNone/>
             </a:pPr>
             <a:r>
@@ -12639,7 +12737,7 @@
             <a:endParaRPr lang="en-US" sz="1100" dirty="0"/>
           </a:p>
           <a:p>
-            <a:pPr indent="0" marL="0">
+            <a:pPr marL="0" indent="0">
               <a:buNone/>
             </a:pPr>
             <a:r>
@@ -12656,7 +12754,7 @@
             <a:endParaRPr lang="en-US" sz="1100" dirty="0"/>
           </a:p>
           <a:p>
-            <a:pPr indent="0" marL="0">
+            <a:pPr marL="0" indent="0">
               <a:buNone/>
             </a:pPr>
             <a:r>
@@ -12673,7 +12771,7 @@
             <a:endParaRPr lang="en-US" sz="1100" dirty="0"/>
           </a:p>
           <a:p>
-            <a:pPr indent="0" marL="0">
+            <a:pPr marL="0" indent="0">
               <a:buNone/>
             </a:pPr>
             <a:r>
@@ -12690,7 +12788,7 @@
             <a:endParaRPr lang="en-US" sz="1100" dirty="0"/>
           </a:p>
           <a:p>
-            <a:pPr indent="0" marL="0">
+            <a:pPr marL="0" indent="0">
               <a:buNone/>
             </a:pPr>
             <a:r>
@@ -12707,7 +12805,7 @@
             <a:endParaRPr lang="en-US" sz="1100" dirty="0"/>
           </a:p>
           <a:p>
-            <a:pPr indent="0" marL="0">
+            <a:pPr marL="0" indent="0">
               <a:buNone/>
             </a:pPr>
             <a:r>
@@ -12774,6 +12872,13 @@
             <a:prstDash val="solid"/>
           </a:ln>
         </p:spPr>
+        <p:txBody>
+          <a:bodyPr/>
+          <a:lstStyle/>
+          <a:p>
+            <a:endParaRPr lang="es-ES"/>
+          </a:p>
+        </p:txBody>
       </p:sp>
       <p:sp>
         <p:nvSpPr>
@@ -12796,7 +12901,7 @@
           <a:bodyPr wrap="square" rtlCol="0" anchor="ctr"/>
           <a:lstStyle/>
           <a:p>
-            <a:pPr indent="0" marL="0">
+            <a:pPr marL="0" indent="0">
               <a:buNone/>
             </a:pPr>
             <a:r>
@@ -12835,7 +12940,7 @@
           <a:bodyPr wrap="square" rtlCol="0" anchor="ctr"/>
           <a:lstStyle/>
           <a:p>
-            <a:pPr algn="r" indent="0" marL="0">
+            <a:pPr marL="0" indent="0" algn="r">
               <a:buNone/>
             </a:pPr>
             <a:r>
@@ -12874,7 +12979,7 @@
           <a:bodyPr wrap="square" rtlCol="0" anchor="t"/>
           <a:lstStyle/>
           <a:p>
-            <a:pPr indent="0" marL="0">
+            <a:pPr marL="0" indent="0">
               <a:buNone/>
             </a:pPr>
             <a:r>
@@ -12916,6 +13021,13 @@
             <a:prstDash val="solid"/>
           </a:ln>
         </p:spPr>
+        <p:txBody>
+          <a:bodyPr/>
+          <a:lstStyle/>
+          <a:p>
+            <a:endParaRPr lang="es-ES"/>
+          </a:p>
+        </p:txBody>
       </p:sp>
       <p:sp>
         <p:nvSpPr>
@@ -12938,7 +13050,7 @@
           <a:bodyPr wrap="square" rtlCol="0" anchor="ctr"/>
           <a:lstStyle/>
           <a:p>
-            <a:pPr indent="0" marL="0">
+            <a:pPr marL="0" indent="0">
               <a:buNone/>
             </a:pPr>
             <a:r>
@@ -13005,6 +13117,13 @@
             <a:prstDash val="solid"/>
           </a:ln>
         </p:spPr>
+        <p:txBody>
+          <a:bodyPr/>
+          <a:lstStyle/>
+          <a:p>
+            <a:endParaRPr lang="es-ES"/>
+          </a:p>
+        </p:txBody>
       </p:sp>
       <p:sp>
         <p:nvSpPr>
@@ -13027,7 +13146,7 @@
           <a:bodyPr wrap="square" rtlCol="0" anchor="ctr"/>
           <a:lstStyle/>
           <a:p>
-            <a:pPr indent="0" marL="0">
+            <a:pPr marL="0" indent="0">
               <a:buNone/>
             </a:pPr>
             <a:r>
@@ -13066,7 +13185,7 @@
           <a:bodyPr wrap="square" rtlCol="0" anchor="ctr"/>
           <a:lstStyle/>
           <a:p>
-            <a:pPr algn="r" indent="0" marL="0">
+            <a:pPr marL="0" indent="0" algn="r">
               <a:buNone/>
             </a:pPr>
             <a:r>
@@ -13236,6 +13355,13 @@
             <a:prstDash val="solid"/>
           </a:ln>
         </p:spPr>
+        <p:txBody>
+          <a:bodyPr/>
+          <a:lstStyle/>
+          <a:p>
+            <a:endParaRPr lang="es-ES"/>
+          </a:p>
+        </p:txBody>
       </p:sp>
       <p:sp>
         <p:nvSpPr>
@@ -13258,7 +13384,7 @@
           <a:bodyPr wrap="square" rtlCol="0" anchor="ctr"/>
           <a:lstStyle/>
           <a:p>
-            <a:pPr indent="0" marL="0">
+            <a:pPr marL="0" indent="0">
               <a:buNone/>
             </a:pPr>
             <a:r>
@@ -13297,7 +13423,7 @@
           <a:bodyPr wrap="square" rtlCol="0" anchor="ctr"/>
           <a:lstStyle/>
           <a:p>
-            <a:pPr algn="r" indent="0" marL="0">
+            <a:pPr marL="0" indent="0" algn="r">
               <a:buNone/>
             </a:pPr>
             <a:r>
@@ -13336,7 +13462,7 @@
           <a:bodyPr wrap="square" rtlCol="0" anchor="t"/>
           <a:lstStyle/>
           <a:p>
-            <a:pPr indent="0" marL="0">
+            <a:pPr marL="0" indent="0">
               <a:buNone/>
             </a:pPr>
             <a:r>
@@ -13378,6 +13504,13 @@
             <a:prstDash val="solid"/>
           </a:ln>
         </p:spPr>
+        <p:txBody>
+          <a:bodyPr/>
+          <a:lstStyle/>
+          <a:p>
+            <a:endParaRPr lang="es-ES"/>
+          </a:p>
+        </p:txBody>
       </p:sp>
       <p:sp>
         <p:nvSpPr>
@@ -13403,6 +13536,13 @@
             <a:prstDash val="solid"/>
           </a:ln>
         </p:spPr>
+        <p:txBody>
+          <a:bodyPr/>
+          <a:lstStyle/>
+          <a:p>
+            <a:endParaRPr lang="es-ES"/>
+          </a:p>
+        </p:txBody>
       </p:sp>
       <p:sp>
         <p:nvSpPr>
@@ -13425,7 +13565,7 @@
           <a:bodyPr wrap="square" rtlCol="0" anchor="t"/>
           <a:lstStyle/>
           <a:p>
-            <a:pPr indent="0" marL="0">
+            <a:pPr marL="0" indent="0">
               <a:buNone/>
             </a:pPr>
             <a:r>
@@ -13442,7 +13582,7 @@
             <a:endParaRPr lang="en-US" sz="1250" dirty="0"/>
           </a:p>
           <a:p>
-            <a:pPr indent="0" marL="0">
+            <a:pPr marL="0" indent="0">
               <a:buNone/>
             </a:pPr>
             <a:r>
@@ -13459,7 +13599,7 @@
             <a:endParaRPr lang="en-US" sz="1250" dirty="0"/>
           </a:p>
           <a:p>
-            <a:pPr indent="0" marL="0">
+            <a:pPr marL="0" indent="0">
               <a:buNone/>
             </a:pPr>
             <a:r>
@@ -13476,7 +13616,7 @@
             <a:endParaRPr lang="en-US" sz="1250" dirty="0"/>
           </a:p>
           <a:p>
-            <a:pPr indent="0" marL="0">
+            <a:pPr marL="0" indent="0">
               <a:buNone/>
             </a:pPr>
             <a:r>
@@ -13493,7 +13633,7 @@
             <a:endParaRPr lang="en-US" sz="1250" dirty="0"/>
           </a:p>
           <a:p>
-            <a:pPr indent="0" marL="0">
+            <a:pPr marL="0" indent="0">
               <a:buNone/>
             </a:pPr>
             <a:r>
@@ -13510,13 +13650,13 @@
             <a:endParaRPr lang="en-US" sz="1250" dirty="0"/>
           </a:p>
           <a:p>
-            <a:pPr indent="0" marL="0">
+            <a:pPr marL="0" indent="0">
               <a:buNone/>
             </a:pPr>
             <a:endParaRPr lang="en-US" sz="1250" dirty="0"/>
           </a:p>
           <a:p>
-            <a:pPr indent="0" marL="0">
+            <a:pPr marL="0" indent="0">
               <a:buNone/>
             </a:pPr>
             <a:r>
@@ -13533,7 +13673,7 @@
             <a:endParaRPr lang="en-US" sz="1250" dirty="0"/>
           </a:p>
           <a:p>
-            <a:pPr indent="0" marL="0">
+            <a:pPr marL="0" indent="0">
               <a:buNone/>
             </a:pPr>
             <a:r>
@@ -13550,7 +13690,7 @@
             <a:endParaRPr lang="en-US" sz="1250" dirty="0"/>
           </a:p>
           <a:p>
-            <a:pPr indent="0" marL="0">
+            <a:pPr marL="0" indent="0">
               <a:buNone/>
             </a:pPr>
             <a:r>
@@ -13567,7 +13707,7 @@
             <a:endParaRPr lang="en-US" sz="1250" dirty="0"/>
           </a:p>
           <a:p>
-            <a:pPr indent="0" marL="0">
+            <a:pPr marL="0" indent="0">
               <a:buNone/>
             </a:pPr>
             <a:r>
@@ -13606,7 +13746,7 @@
           <a:bodyPr wrap="square" rtlCol="0" anchor="t"/>
           <a:lstStyle/>
           <a:p>
-            <a:pPr indent="0" marL="0">
+            <a:pPr marL="0" indent="0">
               <a:buNone/>
             </a:pPr>
             <a:r>
@@ -13673,6 +13813,13 @@
             <a:prstDash val="solid"/>
           </a:ln>
         </p:spPr>
+        <p:txBody>
+          <a:bodyPr/>
+          <a:lstStyle/>
+          <a:p>
+            <a:endParaRPr lang="es-ES"/>
+          </a:p>
+        </p:txBody>
       </p:sp>
       <p:sp>
         <p:nvSpPr>
@@ -13695,7 +13842,7 @@
           <a:bodyPr wrap="square" rtlCol="0" anchor="ctr"/>
           <a:lstStyle/>
           <a:p>
-            <a:pPr indent="0" marL="0">
+            <a:pPr marL="0" indent="0">
               <a:buNone/>
             </a:pPr>
             <a:r>
@@ -13734,7 +13881,7 @@
           <a:bodyPr wrap="square" rtlCol="0" anchor="ctr"/>
           <a:lstStyle/>
           <a:p>
-            <a:pPr algn="r" indent="0" marL="0">
+            <a:pPr marL="0" indent="0" algn="r">
               <a:buNone/>
             </a:pPr>
             <a:r>
@@ -13776,6 +13923,13 @@
             <a:prstDash val="solid"/>
           </a:ln>
         </p:spPr>
+        <p:txBody>
+          <a:bodyPr/>
+          <a:lstStyle/>
+          <a:p>
+            <a:endParaRPr lang="es-ES"/>
+          </a:p>
+        </p:txBody>
       </p:sp>
       <p:sp>
         <p:nvSpPr>
@@ -13801,6 +13955,13 @@
             <a:prstDash val="solid"/>
           </a:ln>
         </p:spPr>
+        <p:txBody>
+          <a:bodyPr/>
+          <a:lstStyle/>
+          <a:p>
+            <a:endParaRPr lang="es-ES"/>
+          </a:p>
+        </p:txBody>
       </p:sp>
       <p:sp>
         <p:nvSpPr>
@@ -13823,7 +13984,7 @@
           <a:bodyPr wrap="square" rtlCol="0" anchor="t"/>
           <a:lstStyle/>
           <a:p>
-            <a:pPr indent="0" marL="0">
+            <a:pPr marL="0" indent="0">
               <a:buNone/>
             </a:pPr>
             <a:r>
@@ -13840,7 +14001,7 @@
             <a:endParaRPr lang="en-US" sz="1500" dirty="0"/>
           </a:p>
           <a:p>
-            <a:pPr indent="0" marL="0">
+            <a:pPr marL="0" indent="0">
               <a:buNone/>
             </a:pPr>
             <a:r>
@@ -13857,7 +14018,7 @@
             <a:endParaRPr lang="en-US" sz="1500" dirty="0"/>
           </a:p>
           <a:p>
-            <a:pPr indent="0" marL="0">
+            <a:pPr marL="0" indent="0">
               <a:buNone/>
             </a:pPr>
             <a:r>
@@ -13874,7 +14035,7 @@
             <a:endParaRPr lang="en-US" sz="1500" dirty="0"/>
           </a:p>
           <a:p>
-            <a:pPr indent="0" marL="0">
+            <a:pPr marL="0" indent="0">
               <a:buNone/>
             </a:pPr>
             <a:r>
@@ -13891,7 +14052,7 @@
             <a:endParaRPr lang="en-US" sz="1500" dirty="0"/>
           </a:p>
           <a:p>
-            <a:pPr indent="0" marL="0">
+            <a:pPr marL="0" indent="0">
               <a:buNone/>
             </a:pPr>
             <a:r>
@@ -13933,6 +14094,13 @@
             <a:prstDash val="solid"/>
           </a:ln>
         </p:spPr>
+        <p:txBody>
+          <a:bodyPr/>
+          <a:lstStyle/>
+          <a:p>
+            <a:endParaRPr lang="es-ES"/>
+          </a:p>
+        </p:txBody>
       </p:sp>
       <p:sp>
         <p:nvSpPr>
@@ -13955,7 +14123,7 @@
           <a:bodyPr wrap="square" rtlCol="0" anchor="ctr"/>
           <a:lstStyle/>
           <a:p>
-            <a:pPr indent="0" marL="0">
+            <a:pPr marL="0" indent="0">
               <a:buNone/>
             </a:pPr>
             <a:r>
@@ -14022,6 +14190,13 @@
             <a:prstDash val="solid"/>
           </a:ln>
         </p:spPr>
+        <p:txBody>
+          <a:bodyPr/>
+          <a:lstStyle/>
+          <a:p>
+            <a:endParaRPr lang="es-ES"/>
+          </a:p>
+        </p:txBody>
       </p:sp>
       <p:sp>
         <p:nvSpPr>
@@ -14044,7 +14219,7 @@
           <a:bodyPr wrap="square" rtlCol="0" anchor="ctr"/>
           <a:lstStyle/>
           <a:p>
-            <a:pPr indent="0" marL="0">
+            <a:pPr marL="0" indent="0">
               <a:buNone/>
             </a:pPr>
             <a:r>
@@ -14083,7 +14258,7 @@
           <a:bodyPr wrap="square" rtlCol="0" anchor="ctr"/>
           <a:lstStyle/>
           <a:p>
-            <a:pPr algn="r" indent="0" marL="0">
+            <a:pPr marL="0" indent="0" algn="r">
               <a:buNone/>
             </a:pPr>
             <a:r>
@@ -14125,6 +14300,13 @@
             <a:prstDash val="solid"/>
           </a:ln>
         </p:spPr>
+        <p:txBody>
+          <a:bodyPr/>
+          <a:lstStyle/>
+          <a:p>
+            <a:endParaRPr lang="es-ES"/>
+          </a:p>
+        </p:txBody>
       </p:sp>
       <p:sp>
         <p:nvSpPr>
@@ -14150,6 +14332,13 @@
             <a:prstDash val="solid"/>
           </a:ln>
         </p:spPr>
+        <p:txBody>
+          <a:bodyPr/>
+          <a:lstStyle/>
+          <a:p>
+            <a:endParaRPr lang="es-ES"/>
+          </a:p>
+        </p:txBody>
       </p:sp>
       <p:sp>
         <p:nvSpPr>
@@ -14172,7 +14361,7 @@
           <a:bodyPr wrap="square" rtlCol="0" anchor="t"/>
           <a:lstStyle/>
           <a:p>
-            <a:pPr indent="0" marL="0">
+            <a:pPr marL="0" indent="0">
               <a:buNone/>
             </a:pPr>
             <a:r>
@@ -14189,7 +14378,7 @@
             <a:endParaRPr lang="en-US" sz="1350" dirty="0"/>
           </a:p>
           <a:p>
-            <a:pPr indent="0" marL="0">
+            <a:pPr marL="0" indent="0">
               <a:buNone/>
             </a:pPr>
             <a:r>
@@ -14206,7 +14395,7 @@
             <a:endParaRPr lang="en-US" sz="1350" dirty="0"/>
           </a:p>
           <a:p>
-            <a:pPr indent="0" marL="0">
+            <a:pPr marL="0" indent="0">
               <a:buNone/>
             </a:pPr>
             <a:r>
@@ -14223,7 +14412,7 @@
             <a:endParaRPr lang="en-US" sz="1350" dirty="0"/>
           </a:p>
           <a:p>
-            <a:pPr indent="0" marL="0">
+            <a:pPr marL="0" indent="0">
               <a:buNone/>
             </a:pPr>
             <a:r>
@@ -14240,7 +14429,7 @@
             <a:endParaRPr lang="en-US" sz="1350" dirty="0"/>
           </a:p>
           <a:p>
-            <a:pPr indent="0" marL="0">
+            <a:pPr marL="0" indent="0">
               <a:buNone/>
             </a:pPr>
             <a:r>
@@ -14257,7 +14446,7 @@
             <a:endParaRPr lang="en-US" sz="1350" dirty="0"/>
           </a:p>
           <a:p>
-            <a:pPr indent="0" marL="0">
+            <a:pPr marL="0" indent="0">
               <a:buNone/>
             </a:pPr>
             <a:r>
@@ -14274,7 +14463,7 @@
             <a:endParaRPr lang="en-US" sz="1350" dirty="0"/>
           </a:p>
           <a:p>
-            <a:pPr indent="0" marL="0">
+            <a:pPr marL="0" indent="0">
               <a:buNone/>
             </a:pPr>
             <a:r>
@@ -14291,7 +14480,7 @@
             <a:endParaRPr lang="en-US" sz="1350" dirty="0"/>
           </a:p>
           <a:p>
-            <a:pPr indent="0" marL="0">
+            <a:pPr marL="0" indent="0">
               <a:buNone/>
             </a:pPr>
             <a:r>
@@ -14308,7 +14497,7 @@
             <a:endParaRPr lang="en-US" sz="1350" dirty="0"/>
           </a:p>
           <a:p>
-            <a:pPr indent="0" marL="0">
+            <a:pPr marL="0" indent="0">
               <a:buNone/>
             </a:pPr>
             <a:r>
@@ -14325,7 +14514,7 @@
             <a:endParaRPr lang="en-US" sz="1350" dirty="0"/>
           </a:p>
           <a:p>
-            <a:pPr indent="0" marL="0">
+            <a:pPr marL="0" indent="0">
               <a:buNone/>
             </a:pPr>
             <a:r>
@@ -14342,7 +14531,7 @@
             <a:endParaRPr lang="en-US" sz="1350" dirty="0"/>
           </a:p>
           <a:p>
-            <a:pPr indent="0" marL="0">
+            <a:pPr marL="0" indent="0">
               <a:buNone/>
             </a:pPr>
             <a:r>
@@ -14381,7 +14570,7 @@
           <a:bodyPr wrap="square" rtlCol="0" anchor="t"/>
           <a:lstStyle/>
           <a:p>
-            <a:pPr indent="0" marL="0">
+            <a:pPr marL="0" indent="0">
               <a:buNone/>
             </a:pPr>
             <a:r>
@@ -14448,6 +14637,13 @@
             <a:prstDash val="solid"/>
           </a:ln>
         </p:spPr>
+        <p:txBody>
+          <a:bodyPr/>
+          <a:lstStyle/>
+          <a:p>
+            <a:endParaRPr lang="es-ES"/>
+          </a:p>
+        </p:txBody>
       </p:sp>
       <p:sp>
         <p:nvSpPr>
@@ -14470,7 +14666,7 @@
           <a:bodyPr wrap="square" rtlCol="0" anchor="ctr"/>
           <a:lstStyle/>
           <a:p>
-            <a:pPr indent="0" marL="0">
+            <a:pPr marL="0" indent="0">
               <a:buNone/>
             </a:pPr>
             <a:r>
@@ -14509,7 +14705,7 @@
           <a:bodyPr wrap="square" rtlCol="0" anchor="ctr"/>
           <a:lstStyle/>
           <a:p>
-            <a:pPr algn="r" indent="0" marL="0">
+            <a:pPr marL="0" indent="0" algn="r">
               <a:buNone/>
             </a:pPr>
             <a:r>
@@ -14658,6 +14854,13 @@
             <a:prstDash val="solid"/>
           </a:ln>
         </p:spPr>
+        <p:txBody>
+          <a:bodyPr/>
+          <a:lstStyle/>
+          <a:p>
+            <a:endParaRPr lang="es-ES"/>
+          </a:p>
+        </p:txBody>
       </p:sp>
       <p:sp>
         <p:nvSpPr>
@@ -14680,7 +14883,7 @@
           <a:bodyPr wrap="square" rtlCol="0" anchor="ctr"/>
           <a:lstStyle/>
           <a:p>
-            <a:pPr indent="0" marL="0">
+            <a:pPr marL="0" indent="0">
               <a:buNone/>
             </a:pPr>
             <a:r>
@@ -14719,7 +14922,7 @@
           <a:bodyPr wrap="square" rtlCol="0" anchor="ctr"/>
           <a:lstStyle/>
           <a:p>
-            <a:pPr algn="r" indent="0" marL="0">
+            <a:pPr marL="0" indent="0" algn="r">
               <a:buNone/>
             </a:pPr>
             <a:r>
@@ -14761,6 +14964,13 @@
             <a:prstDash val="solid"/>
           </a:ln>
         </p:spPr>
+        <p:txBody>
+          <a:bodyPr/>
+          <a:lstStyle/>
+          <a:p>
+            <a:endParaRPr lang="es-ES"/>
+          </a:p>
+        </p:txBody>
       </p:sp>
       <p:sp>
         <p:nvSpPr>
@@ -14783,7 +14993,7 @@
           <a:bodyPr wrap="square" rtlCol="0" anchor="ctr"/>
           <a:lstStyle/>
           <a:p>
-            <a:pPr indent="0" marL="0">
+            <a:pPr marL="0" indent="0">
               <a:buNone/>
             </a:pPr>
             <a:r>
@@ -14822,7 +15032,7 @@
           <a:bodyPr wrap="square" rtlCol="0" anchor="t"/>
           <a:lstStyle/>
           <a:p>
-            <a:pPr indent="0" marL="0">
+            <a:pPr marL="0" indent="0">
               <a:buNone/>
             </a:pPr>
             <a:r>
@@ -14889,6 +15099,13 @@
             <a:prstDash val="solid"/>
           </a:ln>
         </p:spPr>
+        <p:txBody>
+          <a:bodyPr/>
+          <a:lstStyle/>
+          <a:p>
+            <a:endParaRPr lang="es-ES"/>
+          </a:p>
+        </p:txBody>
       </p:sp>
       <p:sp>
         <p:nvSpPr>
@@ -14911,7 +15128,7 @@
           <a:bodyPr wrap="square" rtlCol="0" anchor="ctr"/>
           <a:lstStyle/>
           <a:p>
-            <a:pPr indent="0" marL="0">
+            <a:pPr marL="0" indent="0">
               <a:buNone/>
             </a:pPr>
             <a:r>
@@ -14950,7 +15167,7 @@
           <a:bodyPr wrap="square" rtlCol="0" anchor="ctr"/>
           <a:lstStyle/>
           <a:p>
-            <a:pPr algn="r" indent="0" marL="0">
+            <a:pPr marL="0" indent="0" algn="r">
               <a:buNone/>
             </a:pPr>
             <a:r>
@@ -14992,6 +15209,13 @@
             <a:prstDash val="solid"/>
           </a:ln>
         </p:spPr>
+        <p:txBody>
+          <a:bodyPr/>
+          <a:lstStyle/>
+          <a:p>
+            <a:endParaRPr lang="es-ES"/>
+          </a:p>
+        </p:txBody>
       </p:sp>
       <p:sp>
         <p:nvSpPr>
@@ -15014,7 +15238,7 @@
           <a:bodyPr wrap="square" rtlCol="0" anchor="ctr"/>
           <a:lstStyle/>
           <a:p>
-            <a:pPr indent="0" marL="0">
+            <a:pPr marL="0" indent="0">
               <a:buNone/>
             </a:pPr>
             <a:r>
@@ -15053,7 +15277,7 @@
           <a:bodyPr wrap="square" rtlCol="0" anchor="t"/>
           <a:lstStyle/>
           <a:p>
-            <a:pPr indent="0" marL="0">
+            <a:pPr marL="0" indent="0">
               <a:buNone/>
             </a:pPr>
             <a:r>
@@ -15120,6 +15344,13 @@
             <a:prstDash val="solid"/>
           </a:ln>
         </p:spPr>
+        <p:txBody>
+          <a:bodyPr/>
+          <a:lstStyle/>
+          <a:p>
+            <a:endParaRPr lang="es-ES"/>
+          </a:p>
+        </p:txBody>
       </p:sp>
       <p:sp>
         <p:nvSpPr>
@@ -15142,7 +15373,7 @@
           <a:bodyPr wrap="square" rtlCol="0" anchor="ctr"/>
           <a:lstStyle/>
           <a:p>
-            <a:pPr indent="0" marL="0">
+            <a:pPr marL="0" indent="0">
               <a:buNone/>
             </a:pPr>
             <a:r>
@@ -15181,7 +15412,7 @@
           <a:bodyPr wrap="square" rtlCol="0" anchor="ctr"/>
           <a:lstStyle/>
           <a:p>
-            <a:pPr algn="r" indent="0" marL="0">
+            <a:pPr marL="0" indent="0" algn="r">
               <a:buNone/>
             </a:pPr>
             <a:r>
@@ -15351,6 +15582,13 @@
             <a:prstDash val="solid"/>
           </a:ln>
         </p:spPr>
+        <p:txBody>
+          <a:bodyPr/>
+          <a:lstStyle/>
+          <a:p>
+            <a:endParaRPr lang="es-ES"/>
+          </a:p>
+        </p:txBody>
       </p:sp>
       <p:sp>
         <p:nvSpPr>
@@ -15373,7 +15611,7 @@
           <a:bodyPr wrap="square" rtlCol="0" anchor="ctr"/>
           <a:lstStyle/>
           <a:p>
-            <a:pPr indent="0" marL="0">
+            <a:pPr marL="0" indent="0">
               <a:buNone/>
             </a:pPr>
             <a:r>
@@ -15412,7 +15650,7 @@
           <a:bodyPr wrap="square" rtlCol="0" anchor="ctr"/>
           <a:lstStyle/>
           <a:p>
-            <a:pPr algn="r" indent="0" marL="0">
+            <a:pPr marL="0" indent="0" algn="r">
               <a:buNone/>
             </a:pPr>
             <a:r>
@@ -15582,6 +15820,13 @@
             <a:prstDash val="solid"/>
           </a:ln>
         </p:spPr>
+        <p:txBody>
+          <a:bodyPr/>
+          <a:lstStyle/>
+          <a:p>
+            <a:endParaRPr lang="es-ES"/>
+          </a:p>
+        </p:txBody>
       </p:sp>
       <p:sp>
         <p:nvSpPr>
@@ -15604,7 +15849,7 @@
           <a:bodyPr wrap="square" rtlCol="0" anchor="ctr"/>
           <a:lstStyle/>
           <a:p>
-            <a:pPr indent="0" marL="0">
+            <a:pPr marL="0" indent="0">
               <a:buNone/>
             </a:pPr>
             <a:r>
@@ -15643,7 +15888,7 @@
           <a:bodyPr wrap="square" rtlCol="0" anchor="ctr"/>
           <a:lstStyle/>
           <a:p>
-            <a:pPr algn="r" indent="0" marL="0">
+            <a:pPr marL="0" indent="0" algn="r">
               <a:buNone/>
             </a:pPr>
             <a:r>
@@ -15685,6 +15930,13 @@
             <a:prstDash val="solid"/>
           </a:ln>
         </p:spPr>
+        <p:txBody>
+          <a:bodyPr/>
+          <a:lstStyle/>
+          <a:p>
+            <a:endParaRPr lang="es-ES"/>
+          </a:p>
+        </p:txBody>
       </p:sp>
       <p:sp>
         <p:nvSpPr>
@@ -15707,7 +15959,7 @@
           <a:bodyPr wrap="square" rtlCol="0" anchor="ctr"/>
           <a:lstStyle/>
           <a:p>
-            <a:pPr algn="ctr" indent="0" marL="0">
+            <a:pPr marL="0" indent="0" algn="ctr">
               <a:buNone/>
             </a:pPr>
             <a:r>
@@ -15746,7 +15998,7 @@
           <a:bodyPr wrap="square" rtlCol="0" anchor="ctr"/>
           <a:lstStyle/>
           <a:p>
-            <a:pPr algn="ctr" indent="0" marL="0">
+            <a:pPr marL="0" indent="0" algn="ctr">
               <a:buNone/>
             </a:pPr>
             <a:r>
@@ -15788,6 +16040,13 @@
             <a:prstDash val="solid"/>
           </a:ln>
         </p:spPr>
+        <p:txBody>
+          <a:bodyPr/>
+          <a:lstStyle/>
+          <a:p>
+            <a:endParaRPr lang="es-ES"/>
+          </a:p>
+        </p:txBody>
       </p:sp>
       <p:sp>
         <p:nvSpPr>
@@ -15810,7 +16069,7 @@
           <a:bodyPr wrap="square" rtlCol="0" anchor="ctr"/>
           <a:lstStyle/>
           <a:p>
-            <a:pPr algn="ctr" indent="0" marL="0">
+            <a:pPr marL="0" indent="0" algn="ctr">
               <a:buNone/>
             </a:pPr>
             <a:r>
@@ -15849,7 +16108,7 @@
           <a:bodyPr wrap="square" rtlCol="0" anchor="ctr"/>
           <a:lstStyle/>
           <a:p>
-            <a:pPr algn="ctr" indent="0" marL="0">
+            <a:pPr marL="0" indent="0" algn="ctr">
               <a:buNone/>
             </a:pPr>
             <a:r>
@@ -15891,6 +16150,13 @@
             <a:prstDash val="solid"/>
           </a:ln>
         </p:spPr>
+        <p:txBody>
+          <a:bodyPr/>
+          <a:lstStyle/>
+          <a:p>
+            <a:endParaRPr lang="es-ES"/>
+          </a:p>
+        </p:txBody>
       </p:sp>
       <p:sp>
         <p:nvSpPr>
@@ -15913,7 +16179,7 @@
           <a:bodyPr wrap="square" rtlCol="0" anchor="ctr"/>
           <a:lstStyle/>
           <a:p>
-            <a:pPr algn="ctr" indent="0" marL="0">
+            <a:pPr marL="0" indent="0" algn="ctr">
               <a:buNone/>
             </a:pPr>
             <a:r>
@@ -15930,7 +16196,7 @@
             <a:endParaRPr lang="en-US" sz="1600" dirty="0"/>
           </a:p>
           <a:p>
-            <a:pPr algn="ctr" indent="0" marL="0">
+            <a:pPr marL="0" indent="0" algn="ctr">
               <a:buNone/>
             </a:pPr>
             <a:r>
@@ -15972,6 +16238,13 @@
             <a:prstDash val="solid"/>
           </a:ln>
         </p:spPr>
+        <p:txBody>
+          <a:bodyPr/>
+          <a:lstStyle/>
+          <a:p>
+            <a:endParaRPr lang="es-ES"/>
+          </a:p>
+        </p:txBody>
       </p:sp>
       <p:sp>
         <p:nvSpPr>
@@ -15994,7 +16267,7 @@
           <a:bodyPr wrap="square" rtlCol="0" anchor="ctr"/>
           <a:lstStyle/>
           <a:p>
-            <a:pPr algn="ctr" indent="0" marL="0">
+            <a:pPr marL="0" indent="0" algn="ctr">
               <a:buNone/>
             </a:pPr>
             <a:r>
@@ -16033,7 +16306,7 @@
           <a:bodyPr wrap="square" rtlCol="0" anchor="ctr"/>
           <a:lstStyle/>
           <a:p>
-            <a:pPr algn="ctr" indent="0" marL="0">
+            <a:pPr marL="0" indent="0" algn="ctr">
               <a:buNone/>
             </a:pPr>
             <a:r>
@@ -16075,6 +16348,13 @@
             <a:prstDash val="solid"/>
           </a:ln>
         </p:spPr>
+        <p:txBody>
+          <a:bodyPr/>
+          <a:lstStyle/>
+          <a:p>
+            <a:endParaRPr lang="es-ES"/>
+          </a:p>
+        </p:txBody>
       </p:sp>
       <p:sp>
         <p:nvSpPr>
@@ -16097,7 +16377,7 @@
           <a:bodyPr wrap="square" rtlCol="0" anchor="ctr"/>
           <a:lstStyle/>
           <a:p>
-            <a:pPr algn="ctr" indent="0" marL="0">
+            <a:pPr marL="0" indent="0" algn="ctr">
               <a:buNone/>
             </a:pPr>
             <a:r>
@@ -16136,7 +16416,7 @@
           <a:bodyPr wrap="square" rtlCol="0" anchor="ctr"/>
           <a:lstStyle/>
           <a:p>
-            <a:pPr algn="ctr" indent="0" marL="0">
+            <a:pPr marL="0" indent="0" algn="ctr">
               <a:buNone/>
             </a:pPr>
             <a:r>
@@ -16178,6 +16458,13 @@
             <a:prstDash val="solid"/>
           </a:ln>
         </p:spPr>
+        <p:txBody>
+          <a:bodyPr/>
+          <a:lstStyle/>
+          <a:p>
+            <a:endParaRPr lang="es-ES"/>
+          </a:p>
+        </p:txBody>
       </p:sp>
       <p:sp>
         <p:nvSpPr>
@@ -16200,7 +16487,7 @@
           <a:bodyPr wrap="square" rtlCol="0" anchor="ctr"/>
           <a:lstStyle/>
           <a:p>
-            <a:pPr algn="ctr" indent="0" marL="0">
+            <a:pPr marL="0" indent="0" algn="ctr">
               <a:buNone/>
             </a:pPr>
             <a:r>
@@ -16217,7 +16504,7 @@
             <a:endParaRPr lang="en-US" sz="1600" dirty="0"/>
           </a:p>
           <a:p>
-            <a:pPr algn="ctr" indent="0" marL="0">
+            <a:pPr marL="0" indent="0" algn="ctr">
               <a:buNone/>
             </a:pPr>
             <a:r>
@@ -16256,7 +16543,7 @@
           <a:bodyPr wrap="square" rtlCol="0" anchor="t"/>
           <a:lstStyle/>
           <a:p>
-            <a:pPr algn="ctr" indent="0" marL="0">
+            <a:pPr marL="0" indent="0" algn="ctr">
               <a:buNone/>
             </a:pPr>
             <a:r>
@@ -16323,6 +16610,13 @@
             <a:prstDash val="solid"/>
           </a:ln>
         </p:spPr>
+        <p:txBody>
+          <a:bodyPr/>
+          <a:lstStyle/>
+          <a:p>
+            <a:endParaRPr lang="es-ES"/>
+          </a:p>
+        </p:txBody>
       </p:sp>
       <p:sp>
         <p:nvSpPr>
@@ -16345,7 +16639,7 @@
           <a:bodyPr wrap="square" rtlCol="0" anchor="ctr"/>
           <a:lstStyle/>
           <a:p>
-            <a:pPr indent="0" marL="0">
+            <a:pPr marL="0" indent="0">
               <a:buNone/>
             </a:pPr>
             <a:r>
@@ -16384,7 +16678,7 @@
           <a:bodyPr wrap="square" rtlCol="0" anchor="ctr"/>
           <a:lstStyle/>
           <a:p>
-            <a:pPr algn="r" indent="0" marL="0">
+            <a:pPr marL="0" indent="0" algn="r">
               <a:buNone/>
             </a:pPr>
             <a:r>
@@ -16426,6 +16720,13 @@
             <a:prstDash val="solid"/>
           </a:ln>
         </p:spPr>
+        <p:txBody>
+          <a:bodyPr/>
+          <a:lstStyle/>
+          <a:p>
+            <a:endParaRPr lang="es-ES"/>
+          </a:p>
+        </p:txBody>
       </p:sp>
       <p:sp>
         <p:nvSpPr>
@@ -16448,7 +16749,7 @@
           <a:bodyPr wrap="square" rtlCol="0" anchor="ctr"/>
           <a:lstStyle/>
           <a:p>
-            <a:pPr indent="0" marL="0">
+            <a:pPr marL="0" indent="0">
               <a:buNone/>
             </a:pPr>
             <a:r>
@@ -16515,6 +16816,13 @@
             <a:prstDash val="solid"/>
           </a:ln>
         </p:spPr>
+        <p:txBody>
+          <a:bodyPr/>
+          <a:lstStyle/>
+          <a:p>
+            <a:endParaRPr lang="es-ES"/>
+          </a:p>
+        </p:txBody>
       </p:sp>
       <p:sp>
         <p:nvSpPr>
@@ -16537,7 +16845,7 @@
           <a:bodyPr wrap="square" rtlCol="0" anchor="ctr"/>
           <a:lstStyle/>
           <a:p>
-            <a:pPr indent="0" marL="0">
+            <a:pPr marL="0" indent="0">
               <a:buNone/>
             </a:pPr>
             <a:r>
@@ -16576,7 +16884,7 @@
           <a:bodyPr wrap="square" rtlCol="0" anchor="ctr"/>
           <a:lstStyle/>
           <a:p>
-            <a:pPr algn="r" indent="0" marL="0">
+            <a:pPr marL="0" indent="0" algn="r">
               <a:buNone/>
             </a:pPr>
             <a:r>
@@ -16596,14 +16904,14 @@
       </p:sp>
       <p:pic>
         <p:nvPicPr>
-          <p:cNvPr id="5" name="Image 0" descr="C:/Users/Aitor/docxgen/img/psp-t2-jwt-token-autocontenido.png">    </p:cNvPr>
+          <p:cNvPr id="5" name="Image 0" descr="C:/Users/Aitor/docxgen/img/psp-t2-jwt-token-autocontenido.png"/>
           <p:cNvPicPr>
             <a:picLocks noChangeAspect="1"/>
           </p:cNvPicPr>
           <p:nvPr/>
         </p:nvPicPr>
         <p:blipFill>
-          <a:blip r:embed="rId1"/>
+          <a:blip r:embed="rId3"/>
           <a:stretch>
             <a:fillRect/>
           </a:stretch>
@@ -16667,6 +16975,13 @@
             <a:prstDash val="solid"/>
           </a:ln>
         </p:spPr>
+        <p:txBody>
+          <a:bodyPr/>
+          <a:lstStyle/>
+          <a:p>
+            <a:endParaRPr lang="es-ES"/>
+          </a:p>
+        </p:txBody>
       </p:sp>
       <p:sp>
         <p:nvSpPr>
@@ -16689,7 +17004,7 @@
           <a:bodyPr wrap="square" rtlCol="0" anchor="ctr"/>
           <a:lstStyle/>
           <a:p>
-            <a:pPr indent="0" marL="0">
+            <a:pPr marL="0" indent="0">
               <a:buNone/>
             </a:pPr>
             <a:r>
@@ -16728,7 +17043,7 @@
           <a:bodyPr wrap="square" rtlCol="0" anchor="ctr"/>
           <a:lstStyle/>
           <a:p>
-            <a:pPr algn="r" indent="0" marL="0">
+            <a:pPr marL="0" indent="0" algn="r">
               <a:buNone/>
             </a:pPr>
             <a:r>
@@ -16767,7 +17082,7 @@
           <a:bodyPr wrap="square" rtlCol="0" anchor="t"/>
           <a:lstStyle/>
           <a:p>
-            <a:pPr indent="0" marL="0">
+            <a:pPr marL="0" indent="0">
               <a:buNone/>
             </a:pPr>
             <a:r>
@@ -16809,6 +17124,13 @@
             <a:prstDash val="solid"/>
           </a:ln>
         </p:spPr>
+        <p:txBody>
+          <a:bodyPr/>
+          <a:lstStyle/>
+          <a:p>
+            <a:endParaRPr lang="es-ES"/>
+          </a:p>
+        </p:txBody>
       </p:sp>
       <p:sp>
         <p:nvSpPr>
@@ -16831,7 +17153,7 @@
           <a:bodyPr wrap="square" rtlCol="0" anchor="ctr"/>
           <a:lstStyle/>
           <a:p>
-            <a:pPr indent="0" marL="0">
+            <a:pPr marL="0" indent="0">
               <a:buNone/>
             </a:pPr>
             <a:r>
@@ -16898,6 +17220,13 @@
             <a:prstDash val="solid"/>
           </a:ln>
         </p:spPr>
+        <p:txBody>
+          <a:bodyPr/>
+          <a:lstStyle/>
+          <a:p>
+            <a:endParaRPr lang="es-ES"/>
+          </a:p>
+        </p:txBody>
       </p:sp>
       <p:sp>
         <p:nvSpPr>
@@ -16920,7 +17249,7 @@
           <a:bodyPr wrap="square" rtlCol="0" anchor="ctr"/>
           <a:lstStyle/>
           <a:p>
-            <a:pPr indent="0" marL="0">
+            <a:pPr marL="0" indent="0">
               <a:buNone/>
             </a:pPr>
             <a:r>
@@ -16959,7 +17288,7 @@
           <a:bodyPr wrap="square" rtlCol="0" anchor="ctr"/>
           <a:lstStyle/>
           <a:p>
-            <a:pPr algn="r" indent="0" marL="0">
+            <a:pPr marL="0" indent="0" algn="r">
               <a:buNone/>
             </a:pPr>
             <a:r>
@@ -17001,6 +17330,13 @@
             <a:prstDash val="solid"/>
           </a:ln>
         </p:spPr>
+        <p:txBody>
+          <a:bodyPr/>
+          <a:lstStyle/>
+          <a:p>
+            <a:endParaRPr lang="es-ES"/>
+          </a:p>
+        </p:txBody>
       </p:sp>
       <p:sp>
         <p:nvSpPr>
@@ -17023,7 +17359,7 @@
           <a:bodyPr wrap="square" rtlCol="0" anchor="ctr"/>
           <a:lstStyle/>
           <a:p>
-            <a:pPr indent="0" marL="0">
+            <a:pPr marL="0" indent="0">
               <a:buNone/>
             </a:pPr>
             <a:r>
@@ -17062,7 +17398,7 @@
           <a:bodyPr wrap="square" rtlCol="0" anchor="t"/>
           <a:lstStyle/>
           <a:p>
-            <a:pPr indent="0" marL="0">
+            <a:pPr marL="0" indent="0">
               <a:buNone/>
             </a:pPr>
             <a:r>
@@ -17129,6 +17465,13 @@
             <a:prstDash val="solid"/>
           </a:ln>
         </p:spPr>
+        <p:txBody>
+          <a:bodyPr/>
+          <a:lstStyle/>
+          <a:p>
+            <a:endParaRPr lang="es-ES"/>
+          </a:p>
+        </p:txBody>
       </p:sp>
       <p:sp>
         <p:nvSpPr>
@@ -17151,7 +17494,7 @@
           <a:bodyPr wrap="square" rtlCol="0" anchor="ctr"/>
           <a:lstStyle/>
           <a:p>
-            <a:pPr indent="0" marL="0">
+            <a:pPr marL="0" indent="0">
               <a:buNone/>
             </a:pPr>
             <a:r>
@@ -17190,7 +17533,7 @@
           <a:bodyPr wrap="square" rtlCol="0" anchor="ctr"/>
           <a:lstStyle/>
           <a:p>
-            <a:pPr algn="r" indent="0" marL="0">
+            <a:pPr marL="0" indent="0" algn="r">
               <a:buNone/>
             </a:pPr>
             <a:r>
@@ -17232,6 +17575,13 @@
             <a:prstDash val="solid"/>
           </a:ln>
         </p:spPr>
+        <p:txBody>
+          <a:bodyPr/>
+          <a:lstStyle/>
+          <a:p>
+            <a:endParaRPr lang="es-ES"/>
+          </a:p>
+        </p:txBody>
       </p:sp>
       <p:sp>
         <p:nvSpPr>
@@ -17254,7 +17604,7 @@
           <a:bodyPr wrap="square" rtlCol="0" anchor="ctr"/>
           <a:lstStyle/>
           <a:p>
-            <a:pPr indent="0" marL="0">
+            <a:pPr marL="0" indent="0">
               <a:buNone/>
             </a:pPr>
             <a:r>
@@ -17573,4 +17923,319 @@
     </a:ext>
   </a:extLst>
 </a:theme>
+</file>
+
+<file path=ppt/theme/theme2.xml><?xml version="1.0" encoding="utf-8"?>
+<a:theme xmlns:a="http://schemas.openxmlformats.org/drawingml/2006/main" name="Tema de Office">
+  <a:themeElements>
+    <a:clrScheme name="Office">
+      <a:dk1>
+        <a:sysClr val="windowText" lastClr="000000"/>
+      </a:dk1>
+      <a:lt1>
+        <a:sysClr val="window" lastClr="FFFFFF"/>
+      </a:lt1>
+      <a:dk2>
+        <a:srgbClr val="0E2841"/>
+      </a:dk2>
+      <a:lt2>
+        <a:srgbClr val="E8E8E8"/>
+      </a:lt2>
+      <a:accent1>
+        <a:srgbClr val="156082"/>
+      </a:accent1>
+      <a:accent2>
+        <a:srgbClr val="E97132"/>
+      </a:accent2>
+      <a:accent3>
+        <a:srgbClr val="196B24"/>
+      </a:accent3>
+      <a:accent4>
+        <a:srgbClr val="0F9ED5"/>
+      </a:accent4>
+      <a:accent5>
+        <a:srgbClr val="A02B93"/>
+      </a:accent5>
+      <a:accent6>
+        <a:srgbClr val="4EA72E"/>
+      </a:accent6>
+      <a:hlink>
+        <a:srgbClr val="467886"/>
+      </a:hlink>
+      <a:folHlink>
+        <a:srgbClr val="96607D"/>
+      </a:folHlink>
+    </a:clrScheme>
+    <a:fontScheme name="Office">
+      <a:majorFont>
+        <a:latin typeface="Aptos Display" panose="02110004020202020204"/>
+        <a:ea typeface=""/>
+        <a:cs typeface=""/>
+        <a:font script="Jpan" typeface="游ゴシック Light"/>
+        <a:font script="Hang" typeface="맑은 고딕"/>
+        <a:font script="Hans" typeface="等线 Light"/>
+        <a:font script="Hant" typeface="新細明體"/>
+        <a:font script="Arab" typeface="Times New Roman"/>
+        <a:font script="Hebr" typeface="Times New Roman"/>
+        <a:font script="Thai" typeface="Angsana New"/>
+        <a:font script="Ethi" typeface="Nyala"/>
+        <a:font script="Beng" typeface="Vrinda"/>
+        <a:font script="Gujr" typeface="Shruti"/>
+        <a:font script="Khmr" typeface="MoolBoran"/>
+        <a:font script="Knda" typeface="Tunga"/>
+        <a:font script="Guru" typeface="Raavi"/>
+        <a:font script="Cans" typeface="Euphemia"/>
+        <a:font script="Cher" typeface="Plantagenet Cherokee"/>
+        <a:font script="Yiii" typeface="Microsoft Yi Baiti"/>
+        <a:font script="Tibt" typeface="Microsoft Himalaya"/>
+        <a:font script="Thaa" typeface="MV Boli"/>
+        <a:font script="Deva" typeface="Mangal"/>
+        <a:font script="Telu" typeface="Gautami"/>
+        <a:font script="Taml" typeface="Latha"/>
+        <a:font script="Syrc" typeface="Estrangelo Edessa"/>
+        <a:font script="Orya" typeface="Kalinga"/>
+        <a:font script="Mlym" typeface="Kartika"/>
+        <a:font script="Laoo" typeface="DokChampa"/>
+        <a:font script="Sinh" typeface="Iskoola Pota"/>
+        <a:font script="Mong" typeface="Mongolian Baiti"/>
+        <a:font script="Viet" typeface="Times New Roman"/>
+        <a:font script="Uigh" typeface="Microsoft Uighur"/>
+        <a:font script="Geor" typeface="Sylfaen"/>
+        <a:font script="Armn" typeface="Arial"/>
+        <a:font script="Bugi" typeface="Leelawadee UI"/>
+        <a:font script="Bopo" typeface="Microsoft JhengHei"/>
+        <a:font script="Java" typeface="Javanese Text"/>
+        <a:font script="Lisu" typeface="Segoe UI"/>
+        <a:font script="Mymr" typeface="Myanmar Text"/>
+        <a:font script="Nkoo" typeface="Ebrima"/>
+        <a:font script="Olck" typeface="Nirmala UI"/>
+        <a:font script="Osma" typeface="Ebrima"/>
+        <a:font script="Phag" typeface="Phagspa"/>
+        <a:font script="Syrn" typeface="Estrangelo Edessa"/>
+        <a:font script="Syrj" typeface="Estrangelo Edessa"/>
+        <a:font script="Syre" typeface="Estrangelo Edessa"/>
+        <a:font script="Sora" typeface="Nirmala UI"/>
+        <a:font script="Tale" typeface="Microsoft Tai Le"/>
+        <a:font script="Talu" typeface="Microsoft New Tai Lue"/>
+        <a:font script="Tfng" typeface="Ebrima"/>
+      </a:majorFont>
+      <a:minorFont>
+        <a:latin typeface="Aptos" panose="02110004020202020204"/>
+        <a:ea typeface=""/>
+        <a:cs typeface=""/>
+        <a:font script="Jpan" typeface="游ゴシック"/>
+        <a:font script="Hang" typeface="맑은 고딕"/>
+        <a:font script="Hans" typeface="等线"/>
+        <a:font script="Hant" typeface="新細明體"/>
+        <a:font script="Arab" typeface="Arial"/>
+        <a:font script="Hebr" typeface="Arial"/>
+        <a:font script="Thai" typeface="Cordia New"/>
+        <a:font script="Ethi" typeface="Nyala"/>
+        <a:font script="Beng" typeface="Vrinda"/>
+        <a:font script="Gujr" typeface="Shruti"/>
+        <a:font script="Khmr" typeface="DaunPenh"/>
+        <a:font script="Knda" typeface="Tunga"/>
+        <a:font script="Guru" typeface="Raavi"/>
+        <a:font script="Cans" typeface="Euphemia"/>
+        <a:font script="Cher" typeface="Plantagenet Cherokee"/>
+        <a:font script="Yiii" typeface="Microsoft Yi Baiti"/>
+        <a:font script="Tibt" typeface="Microsoft Himalaya"/>
+        <a:font script="Thaa" typeface="MV Boli"/>
+        <a:font script="Deva" typeface="Mangal"/>
+        <a:font script="Telu" typeface="Gautami"/>
+        <a:font script="Taml" typeface="Latha"/>
+        <a:font script="Syrc" typeface="Estrangelo Edessa"/>
+        <a:font script="Orya" typeface="Kalinga"/>
+        <a:font script="Mlym" typeface="Kartika"/>
+        <a:font script="Laoo" typeface="DokChampa"/>
+        <a:font script="Sinh" typeface="Iskoola Pota"/>
+        <a:font script="Mong" typeface="Mongolian Baiti"/>
+        <a:font script="Viet" typeface="Arial"/>
+        <a:font script="Uigh" typeface="Microsoft Uighur"/>
+        <a:font script="Geor" typeface="Sylfaen"/>
+        <a:font script="Armn" typeface="Arial"/>
+        <a:font script="Bugi" typeface="Leelawadee UI"/>
+        <a:font script="Bopo" typeface="Microsoft JhengHei"/>
+        <a:font script="Java" typeface="Javanese Text"/>
+        <a:font script="Lisu" typeface="Segoe UI"/>
+        <a:font script="Mymr" typeface="Myanmar Text"/>
+        <a:font script="Nkoo" typeface="Ebrima"/>
+        <a:font script="Olck" typeface="Nirmala UI"/>
+        <a:font script="Osma" typeface="Ebrima"/>
+        <a:font script="Phag" typeface="Phagspa"/>
+        <a:font script="Syrn" typeface="Estrangelo Edessa"/>
+        <a:font script="Syrj" typeface="Estrangelo Edessa"/>
+        <a:font script="Syre" typeface="Estrangelo Edessa"/>
+        <a:font script="Sora" typeface="Nirmala UI"/>
+        <a:font script="Tale" typeface="Microsoft Tai Le"/>
+        <a:font script="Talu" typeface="Microsoft New Tai Lue"/>
+        <a:font script="Tfng" typeface="Ebrima"/>
+      </a:minorFont>
+    </a:fontScheme>
+    <a:fmtScheme name="Office">
+      <a:fillStyleLst>
+        <a:solidFill>
+          <a:schemeClr val="phClr"/>
+        </a:solidFill>
+        <a:gradFill rotWithShape="1">
+          <a:gsLst>
+            <a:gs pos="0">
+              <a:schemeClr val="phClr">
+                <a:lumMod val="110000"/>
+                <a:satMod val="105000"/>
+                <a:tint val="67000"/>
+              </a:schemeClr>
+            </a:gs>
+            <a:gs pos="50000">
+              <a:schemeClr val="phClr">
+                <a:lumMod val="105000"/>
+                <a:satMod val="103000"/>
+                <a:tint val="73000"/>
+              </a:schemeClr>
+            </a:gs>
+            <a:gs pos="100000">
+              <a:schemeClr val="phClr">
+                <a:lumMod val="105000"/>
+                <a:satMod val="109000"/>
+                <a:tint val="81000"/>
+              </a:schemeClr>
+            </a:gs>
+          </a:gsLst>
+          <a:lin ang="5400000" scaled="0"/>
+        </a:gradFill>
+        <a:gradFill rotWithShape="1">
+          <a:gsLst>
+            <a:gs pos="0">
+              <a:schemeClr val="phClr">
+                <a:satMod val="103000"/>
+                <a:lumMod val="102000"/>
+                <a:tint val="94000"/>
+              </a:schemeClr>
+            </a:gs>
+            <a:gs pos="50000">
+              <a:schemeClr val="phClr">
+                <a:satMod val="110000"/>
+                <a:lumMod val="100000"/>
+                <a:shade val="100000"/>
+              </a:schemeClr>
+            </a:gs>
+            <a:gs pos="100000">
+              <a:schemeClr val="phClr">
+                <a:lumMod val="99000"/>
+                <a:satMod val="120000"/>
+                <a:shade val="78000"/>
+              </a:schemeClr>
+            </a:gs>
+          </a:gsLst>
+          <a:lin ang="5400000" scaled="0"/>
+        </a:gradFill>
+      </a:fillStyleLst>
+      <a:lnStyleLst>
+        <a:ln w="12700" cap="flat" cmpd="sng" algn="ctr">
+          <a:solidFill>
+            <a:schemeClr val="phClr"/>
+          </a:solidFill>
+          <a:prstDash val="solid"/>
+          <a:miter lim="800000"/>
+        </a:ln>
+        <a:ln w="19050" cap="flat" cmpd="sng" algn="ctr">
+          <a:solidFill>
+            <a:schemeClr val="phClr"/>
+          </a:solidFill>
+          <a:prstDash val="solid"/>
+          <a:miter lim="800000"/>
+        </a:ln>
+        <a:ln w="25400" cap="flat" cmpd="sng" algn="ctr">
+          <a:solidFill>
+            <a:schemeClr val="phClr"/>
+          </a:solidFill>
+          <a:prstDash val="solid"/>
+          <a:miter lim="800000"/>
+        </a:ln>
+      </a:lnStyleLst>
+      <a:effectStyleLst>
+        <a:effectStyle>
+          <a:effectLst/>
+        </a:effectStyle>
+        <a:effectStyle>
+          <a:effectLst/>
+        </a:effectStyle>
+        <a:effectStyle>
+          <a:effectLst>
+            <a:outerShdw blurRad="57150" dist="19050" dir="5400000" algn="ctr" rotWithShape="0">
+              <a:srgbClr val="000000">
+                <a:alpha val="63000"/>
+              </a:srgbClr>
+            </a:outerShdw>
+          </a:effectLst>
+        </a:effectStyle>
+      </a:effectStyleLst>
+      <a:bgFillStyleLst>
+        <a:solidFill>
+          <a:schemeClr val="phClr"/>
+        </a:solidFill>
+        <a:solidFill>
+          <a:schemeClr val="phClr">
+            <a:tint val="95000"/>
+            <a:satMod val="170000"/>
+          </a:schemeClr>
+        </a:solidFill>
+        <a:gradFill rotWithShape="1">
+          <a:gsLst>
+            <a:gs pos="0">
+              <a:schemeClr val="phClr">
+                <a:tint val="93000"/>
+                <a:satMod val="150000"/>
+                <a:shade val="98000"/>
+                <a:lumMod val="102000"/>
+              </a:schemeClr>
+            </a:gs>
+            <a:gs pos="50000">
+              <a:schemeClr val="phClr">
+                <a:tint val="98000"/>
+                <a:satMod val="130000"/>
+                <a:shade val="90000"/>
+                <a:lumMod val="103000"/>
+              </a:schemeClr>
+            </a:gs>
+            <a:gs pos="100000">
+              <a:schemeClr val="phClr">
+                <a:shade val="63000"/>
+                <a:satMod val="120000"/>
+              </a:schemeClr>
+            </a:gs>
+          </a:gsLst>
+          <a:lin ang="5400000" scaled="0"/>
+        </a:gradFill>
+      </a:bgFillStyleLst>
+    </a:fmtScheme>
+  </a:themeElements>
+  <a:objectDefaults>
+    <a:lnDef>
+      <a:spPr/>
+      <a:bodyPr/>
+      <a:lstStyle/>
+      <a:style>
+        <a:lnRef idx="2">
+          <a:schemeClr val="accent1"/>
+        </a:lnRef>
+        <a:fillRef idx="0">
+          <a:schemeClr val="accent1"/>
+        </a:fillRef>
+        <a:effectRef idx="1">
+          <a:schemeClr val="accent1"/>
+        </a:effectRef>
+        <a:fontRef idx="minor">
+          <a:schemeClr val="tx1"/>
+        </a:fontRef>
+      </a:style>
+    </a:lnDef>
+  </a:objectDefaults>
+  <a:extraClrSchemeLst/>
+  <a:extLst>
+    <a:ext uri="{05A4C25C-085E-4340-85A3-A5531E510DB2}">
+      <thm15:themeFamily xmlns:thm15="http://schemas.microsoft.com/office/thememl/2012/main" name="Office Theme" id="{2E142A2C-CD16-42D6-873A-C26D2A0506FA}" vid="{1BDDFF52-6CD6-40A5-AB3C-68EB2F1E4D0A}"/>
+    </a:ext>
+  </a:extLst>
+</a:theme>
 </file>